--- a/multicore04-1.pptx
+++ b/multicore04-1.pptx
@@ -5,7 +5,7 @@
     <p:sldMasterId id="2147483655" r:id="rId1"/>
   </p:sldMasterIdLst>
   <p:notesMasterIdLst>
-    <p:notesMasterId r:id="rId58"/>
+    <p:notesMasterId r:id="rId59"/>
   </p:notesMasterIdLst>
   <p:sldIdLst>
     <p:sldId id="346" r:id="rId2"/>
@@ -30,40 +30,41 @@
     <p:sldId id="403" r:id="rId21"/>
     <p:sldId id="404" r:id="rId22"/>
     <p:sldId id="405" r:id="rId23"/>
-    <p:sldId id="363" r:id="rId24"/>
-    <p:sldId id="365" r:id="rId25"/>
-    <p:sldId id="366" r:id="rId26"/>
-    <p:sldId id="367" r:id="rId27"/>
-    <p:sldId id="368" r:id="rId28"/>
-    <p:sldId id="369" r:id="rId29"/>
-    <p:sldId id="370" r:id="rId30"/>
-    <p:sldId id="371" r:id="rId31"/>
-    <p:sldId id="372" r:id="rId32"/>
-    <p:sldId id="373" r:id="rId33"/>
-    <p:sldId id="374" r:id="rId34"/>
-    <p:sldId id="375" r:id="rId35"/>
-    <p:sldId id="376" r:id="rId36"/>
-    <p:sldId id="377" r:id="rId37"/>
-    <p:sldId id="378" r:id="rId38"/>
-    <p:sldId id="380" r:id="rId39"/>
-    <p:sldId id="381" r:id="rId40"/>
-    <p:sldId id="382" r:id="rId41"/>
-    <p:sldId id="384" r:id="rId42"/>
-    <p:sldId id="383" r:id="rId43"/>
-    <p:sldId id="389" r:id="rId44"/>
-    <p:sldId id="390" r:id="rId45"/>
-    <p:sldId id="391" r:id="rId46"/>
-    <p:sldId id="392" r:id="rId47"/>
-    <p:sldId id="385" r:id="rId48"/>
-    <p:sldId id="393" r:id="rId49"/>
-    <p:sldId id="394" r:id="rId50"/>
-    <p:sldId id="401" r:id="rId51"/>
-    <p:sldId id="395" r:id="rId52"/>
-    <p:sldId id="396" r:id="rId53"/>
-    <p:sldId id="399" r:id="rId54"/>
-    <p:sldId id="398" r:id="rId55"/>
-    <p:sldId id="400" r:id="rId56"/>
-    <p:sldId id="397" r:id="rId57"/>
+    <p:sldId id="406" r:id="rId24"/>
+    <p:sldId id="363" r:id="rId25"/>
+    <p:sldId id="365" r:id="rId26"/>
+    <p:sldId id="366" r:id="rId27"/>
+    <p:sldId id="367" r:id="rId28"/>
+    <p:sldId id="368" r:id="rId29"/>
+    <p:sldId id="369" r:id="rId30"/>
+    <p:sldId id="370" r:id="rId31"/>
+    <p:sldId id="371" r:id="rId32"/>
+    <p:sldId id="372" r:id="rId33"/>
+    <p:sldId id="373" r:id="rId34"/>
+    <p:sldId id="374" r:id="rId35"/>
+    <p:sldId id="375" r:id="rId36"/>
+    <p:sldId id="376" r:id="rId37"/>
+    <p:sldId id="377" r:id="rId38"/>
+    <p:sldId id="378" r:id="rId39"/>
+    <p:sldId id="380" r:id="rId40"/>
+    <p:sldId id="381" r:id="rId41"/>
+    <p:sldId id="382" r:id="rId42"/>
+    <p:sldId id="384" r:id="rId43"/>
+    <p:sldId id="383" r:id="rId44"/>
+    <p:sldId id="389" r:id="rId45"/>
+    <p:sldId id="390" r:id="rId46"/>
+    <p:sldId id="391" r:id="rId47"/>
+    <p:sldId id="392" r:id="rId48"/>
+    <p:sldId id="385" r:id="rId49"/>
+    <p:sldId id="393" r:id="rId50"/>
+    <p:sldId id="394" r:id="rId51"/>
+    <p:sldId id="401" r:id="rId52"/>
+    <p:sldId id="395" r:id="rId53"/>
+    <p:sldId id="396" r:id="rId54"/>
+    <p:sldId id="399" r:id="rId55"/>
+    <p:sldId id="398" r:id="rId56"/>
+    <p:sldId id="400" r:id="rId57"/>
+    <p:sldId id="397" r:id="rId58"/>
   </p:sldIdLst>
   <p:sldSz cx="9144000" cy="6858000" type="screen4x3"/>
   <p:notesSz cx="7099300" cy="10234613"/>
@@ -12564,6 +12565,255 @@
       </p:grpSpPr>
       <p:sp>
         <p:nvSpPr>
+          <p:cNvPr id="2" name="제목 1">
+            <a:extLst>
+              <a:ext uri="{FF2B5EF4-FFF2-40B4-BE49-F238E27FC236}">
+                <a16:creationId xmlns:a16="http://schemas.microsoft.com/office/drawing/2014/main" id="{7B1BBA9C-7F8C-CDD7-8FEE-C75AE8A9B5E9}"/>
+              </a:ext>
+            </a:extLst>
+          </p:cNvPr>
+          <p:cNvSpPr>
+            <a:spLocks noGrp="1"/>
+          </p:cNvSpPr>
+          <p:nvPr>
+            <p:ph type="title"/>
+          </p:nvPr>
+        </p:nvSpPr>
+        <p:spPr/>
+        <p:txBody>
+          <a:bodyPr/>
+          <a:lstStyle/>
+          <a:p>
+            <a:r>
+              <a:rPr lang="en-US" altLang="ko-Kore-KR" b="1" u="sng" dirty="0"/>
+              <a:t>Calling run() vs start()?</a:t>
+            </a:r>
+            <a:endParaRPr kumimoji="1" lang="ko-Kore-KR" altLang="en-US" b="1" u="sng" dirty="0"/>
+          </a:p>
+        </p:txBody>
+      </p:sp>
+      <p:sp>
+        <p:nvSpPr>
+          <p:cNvPr id="3" name="내용 개체 틀 2">
+            <a:extLst>
+              <a:ext uri="{FF2B5EF4-FFF2-40B4-BE49-F238E27FC236}">
+                <a16:creationId xmlns:a16="http://schemas.microsoft.com/office/drawing/2014/main" id="{E3327414-BCA7-B393-4ABF-5CA0F945EA2D}"/>
+              </a:ext>
+            </a:extLst>
+          </p:cNvPr>
+          <p:cNvSpPr>
+            <a:spLocks noGrp="1"/>
+          </p:cNvSpPr>
+          <p:nvPr>
+            <p:ph idx="1"/>
+          </p:nvPr>
+        </p:nvSpPr>
+        <p:spPr>
+          <a:xfrm>
+            <a:off x="457200" y="1600200"/>
+            <a:ext cx="8579296" cy="4525963"/>
+          </a:xfrm>
+        </p:spPr>
+        <p:txBody>
+          <a:bodyPr/>
+          <a:lstStyle/>
+          <a:p>
+            <a:r>
+              <a:rPr kumimoji="1" lang="en-US" altLang="ko-Kore-KR" dirty="0"/>
+              <a:t>Common mistake</a:t>
+            </a:r>
+          </a:p>
+          <a:p>
+            <a:endParaRPr lang="en-US" altLang="ko-Kore-KR" dirty="0"/>
+          </a:p>
+          <a:p>
+            <a:endParaRPr kumimoji="1" lang="en-US" altLang="ko-Kore-KR" dirty="0"/>
+          </a:p>
+          <a:p>
+            <a:pPr lvl="1"/>
+            <a:r>
+              <a:rPr lang="en-US" altLang="ko-Kore-KR" sz="2000" b="1" dirty="0" err="1">
+                <a:latin typeface="Courier New" panose="02070309020205020404" pitchFamily="49" charset="0"/>
+                <a:cs typeface="Courier New" panose="02070309020205020404" pitchFamily="49" charset="0"/>
+              </a:rPr>
+              <a:t>newThread.run</a:t>
+            </a:r>
+            <a:r>
+              <a:rPr lang="en-US" altLang="ko-Kore-KR" sz="2000" b="1" dirty="0">
+                <a:latin typeface="Courier New" panose="02070309020205020404" pitchFamily="49" charset="0"/>
+                <a:cs typeface="Courier New" panose="02070309020205020404" pitchFamily="49" charset="0"/>
+              </a:rPr>
+              <a:t>() </a:t>
+            </a:r>
+            <a:r>
+              <a:rPr lang="en-US" altLang="ko-Kore-KR" sz="2000" dirty="0"/>
+              <a:t>: executed by original thread</a:t>
+            </a:r>
+          </a:p>
+          <a:p>
+            <a:pPr lvl="1"/>
+            <a:r>
+              <a:rPr lang="en-US" altLang="ko-Kore-KR" sz="2000" b="1" dirty="0" err="1">
+                <a:latin typeface="Courier New" panose="02070309020205020404" pitchFamily="49" charset="0"/>
+                <a:cs typeface="Courier New" panose="02070309020205020404" pitchFamily="49" charset="0"/>
+              </a:rPr>
+              <a:t>newThread.start</a:t>
+            </a:r>
+            <a:r>
+              <a:rPr lang="en-US" altLang="ko-Kore-KR" sz="2000" b="1" dirty="0">
+                <a:latin typeface="Courier New" panose="02070309020205020404" pitchFamily="49" charset="0"/>
+                <a:cs typeface="Courier New" panose="02070309020205020404" pitchFamily="49" charset="0"/>
+              </a:rPr>
+              <a:t>() </a:t>
+            </a:r>
+            <a:r>
+              <a:rPr lang="en-US" altLang="ko-Kore-KR" sz="2000" dirty="0"/>
+              <a:t>: executed by newly created thread </a:t>
+            </a:r>
+          </a:p>
+          <a:p>
+            <a:pPr marL="0" indent="0">
+              <a:buNone/>
+            </a:pPr>
+            <a:r>
+              <a:rPr kumimoji="1" lang="en-US" altLang="ko-Kore-KR" dirty="0"/>
+              <a:t>	</a:t>
+            </a:r>
+            <a:endParaRPr kumimoji="1" lang="ko-Kore-KR" altLang="en-US" dirty="0"/>
+          </a:p>
+        </p:txBody>
+      </p:sp>
+      <p:sp>
+        <p:nvSpPr>
+          <p:cNvPr id="4" name="TextBox 3">
+            <a:extLst>
+              <a:ext uri="{FF2B5EF4-FFF2-40B4-BE49-F238E27FC236}">
+                <a16:creationId xmlns:a16="http://schemas.microsoft.com/office/drawing/2014/main" id="{C13FA817-CC5B-49BD-D444-BAC63C1173D6}"/>
+              </a:ext>
+            </a:extLst>
+          </p:cNvPr>
+          <p:cNvSpPr txBox="1"/>
+          <p:nvPr/>
+        </p:nvSpPr>
+        <p:spPr>
+          <a:xfrm>
+            <a:off x="561256" y="2351782"/>
+            <a:ext cx="8147248" cy="584775"/>
+          </a:xfrm>
+          <a:prstGeom prst="rect">
+            <a:avLst/>
+          </a:prstGeom>
+          <a:solidFill>
+            <a:srgbClr val="FFFFFF"/>
+          </a:solidFill>
+          <a:ln>
+            <a:solidFill>
+              <a:schemeClr val="tx1"/>
+            </a:solidFill>
+          </a:ln>
+        </p:spPr>
+        <p:txBody>
+          <a:bodyPr wrap="square" rtlCol="0">
+            <a:spAutoFit/>
+          </a:bodyPr>
+          <a:lstStyle/>
+          <a:p>
+            <a:pPr marL="0" indent="0">
+              <a:buNone/>
+            </a:pPr>
+            <a:r>
+              <a:rPr lang="en-US" altLang="ko-Kore-KR" sz="1600" b="1" dirty="0">
+                <a:latin typeface="Courier New" panose="02070309020205020404" pitchFamily="49" charset="0"/>
+                <a:cs typeface="Courier New" panose="02070309020205020404" pitchFamily="49" charset="0"/>
+              </a:rPr>
+              <a:t>Thread </a:t>
+            </a:r>
+            <a:r>
+              <a:rPr lang="en-US" altLang="ko-Kore-KR" sz="1600" b="1" dirty="0" err="1">
+                <a:latin typeface="Courier New" panose="02070309020205020404" pitchFamily="49" charset="0"/>
+                <a:cs typeface="Courier New" panose="02070309020205020404" pitchFamily="49" charset="0"/>
+              </a:rPr>
+              <a:t>newThread</a:t>
+            </a:r>
+            <a:r>
+              <a:rPr lang="en-US" altLang="ko-Kore-KR" sz="1600" b="1" dirty="0">
+                <a:latin typeface="Courier New" panose="02070309020205020404" pitchFamily="49" charset="0"/>
+                <a:cs typeface="Courier New" panose="02070309020205020404" pitchFamily="49" charset="0"/>
+              </a:rPr>
+              <a:t> = new Thread(</a:t>
+            </a:r>
+            <a:r>
+              <a:rPr lang="en-US" altLang="ko-Kore-KR" sz="1600" b="1" dirty="0" err="1">
+                <a:latin typeface="Courier New" panose="02070309020205020404" pitchFamily="49" charset="0"/>
+                <a:cs typeface="Courier New" panose="02070309020205020404" pitchFamily="49" charset="0"/>
+              </a:rPr>
+              <a:t>MyRunnable</a:t>
+            </a:r>
+            <a:r>
+              <a:rPr lang="en-US" altLang="ko-Kore-KR" sz="1600" b="1" dirty="0">
+                <a:latin typeface="Courier New" panose="02070309020205020404" pitchFamily="49" charset="0"/>
+                <a:cs typeface="Courier New" panose="02070309020205020404" pitchFamily="49" charset="0"/>
+              </a:rPr>
+              <a:t>()); </a:t>
+            </a:r>
+          </a:p>
+          <a:p>
+            <a:pPr marL="0" indent="0">
+              <a:buNone/>
+            </a:pPr>
+            <a:r>
+              <a:rPr lang="en-US" altLang="ko-Kore-KR" sz="1600" b="1" dirty="0" err="1">
+                <a:latin typeface="Courier New" panose="02070309020205020404" pitchFamily="49" charset="0"/>
+                <a:cs typeface="Courier New" panose="02070309020205020404" pitchFamily="49" charset="0"/>
+              </a:rPr>
+              <a:t>newThread.run</a:t>
+            </a:r>
+            <a:r>
+              <a:rPr lang="en-US" altLang="ko-Kore-KR" sz="1600" b="1" dirty="0">
+                <a:latin typeface="Courier New" panose="02070309020205020404" pitchFamily="49" charset="0"/>
+                <a:cs typeface="Courier New" panose="02070309020205020404" pitchFamily="49" charset="0"/>
+              </a:rPr>
+              <a:t>(); //should be start();</a:t>
+            </a:r>
+            <a:endParaRPr kumimoji="1" lang="ko-Kore-KR" altLang="en-US" sz="1600" b="1" dirty="0">
+              <a:latin typeface="Courier New" panose="02070309020205020404" pitchFamily="49" charset="0"/>
+              <a:cs typeface="Courier New" panose="02070309020205020404" pitchFamily="49" charset="0"/>
+            </a:endParaRPr>
+          </a:p>
+        </p:txBody>
+      </p:sp>
+    </p:spTree>
+    <p:extLst>
+      <p:ext uri="{BB962C8B-B14F-4D97-AF65-F5344CB8AC3E}">
+        <p14:creationId xmlns:p14="http://schemas.microsoft.com/office/powerpoint/2010/main" val="4132121305"/>
+      </p:ext>
+    </p:extLst>
+  </p:cSld>
+  <p:clrMapOvr>
+    <a:masterClrMapping/>
+  </p:clrMapOvr>
+</p:sld>
+</file>
+
+<file path=ppt/slides/slide24.xml><?xml version="1.0" encoding="utf-8"?>
+<p:sld xmlns:a="http://schemas.openxmlformats.org/drawingml/2006/main" xmlns:r="http://schemas.openxmlformats.org/officeDocument/2006/relationships" xmlns:p="http://schemas.openxmlformats.org/presentationml/2006/main">
+  <p:cSld>
+    <p:spTree>
+      <p:nvGrpSpPr>
+        <p:cNvPr id="1" name=""/>
+        <p:cNvGrpSpPr/>
+        <p:nvPr/>
+      </p:nvGrpSpPr>
+      <p:grpSpPr>
+        <a:xfrm>
+          <a:off x="0" y="0"/>
+          <a:ext cx="0" cy="0"/>
+          <a:chOff x="0" y="0"/>
+          <a:chExt cx="0" cy="0"/>
+        </a:xfrm>
+      </p:grpSpPr>
+      <p:sp>
+        <p:nvSpPr>
           <p:cNvPr id="21506" name="제목 1">
             <a:extLst>
               <a:ext uri="{FF2B5EF4-FFF2-40B4-BE49-F238E27FC236}">
@@ -12959,7 +13209,7 @@
 </p:sld>
 </file>
 
-<file path=ppt/slides/slide24.xml><?xml version="1.0" encoding="utf-8"?>
+<file path=ppt/slides/slide25.xml><?xml version="1.0" encoding="utf-8"?>
 <p:sld xmlns:a="http://schemas.openxmlformats.org/drawingml/2006/main" xmlns:r="http://schemas.openxmlformats.org/officeDocument/2006/relationships" xmlns:p="http://schemas.openxmlformats.org/presentationml/2006/main">
   <p:cSld>
     <p:spTree>
@@ -13098,7 +13348,7 @@
 </p:sld>
 </file>
 
-<file path=ppt/slides/slide25.xml><?xml version="1.0" encoding="utf-8"?>
+<file path=ppt/slides/slide26.xml><?xml version="1.0" encoding="utf-8"?>
 <p:sld xmlns:a="http://schemas.openxmlformats.org/drawingml/2006/main" xmlns:r="http://schemas.openxmlformats.org/officeDocument/2006/relationships" xmlns:p="http://schemas.openxmlformats.org/presentationml/2006/main">
   <p:cSld>
     <p:spTree>
@@ -13247,7 +13497,7 @@
 </p:sld>
 </file>
 
-<file path=ppt/slides/slide26.xml><?xml version="1.0" encoding="utf-8"?>
+<file path=ppt/slides/slide27.xml><?xml version="1.0" encoding="utf-8"?>
 <p:sld xmlns:a="http://schemas.openxmlformats.org/drawingml/2006/main" xmlns:r="http://schemas.openxmlformats.org/officeDocument/2006/relationships" xmlns:p="http://schemas.openxmlformats.org/presentationml/2006/main">
   <p:cSld>
     <p:spTree>
@@ -13374,7 +13624,7 @@
 </p:sld>
 </file>
 
-<file path=ppt/slides/slide27.xml><?xml version="1.0" encoding="utf-8"?>
+<file path=ppt/slides/slide28.xml><?xml version="1.0" encoding="utf-8"?>
 <p:sld xmlns:a="http://schemas.openxmlformats.org/drawingml/2006/main" xmlns:r="http://schemas.openxmlformats.org/officeDocument/2006/relationships" xmlns:p="http://schemas.openxmlformats.org/presentationml/2006/main">
   <p:cSld>
     <p:spTree>
@@ -13487,7 +13737,7 @@
 </p:sld>
 </file>
 
-<file path=ppt/slides/slide28.xml><?xml version="1.0" encoding="utf-8"?>
+<file path=ppt/slides/slide29.xml><?xml version="1.0" encoding="utf-8"?>
 <p:sld xmlns:a="http://schemas.openxmlformats.org/drawingml/2006/main" xmlns:r="http://schemas.openxmlformats.org/officeDocument/2006/relationships" xmlns:p="http://schemas.openxmlformats.org/presentationml/2006/main">
   <p:cSld>
     <p:spTree>
@@ -13614,310 +13864,6 @@
           </a:extLst>
         </p:spPr>
       </p:pic>
-    </p:spTree>
-  </p:cSld>
-  <p:clrMapOvr>
-    <a:masterClrMapping/>
-  </p:clrMapOvr>
-</p:sld>
-</file>
-
-<file path=ppt/slides/slide29.xml><?xml version="1.0" encoding="utf-8"?>
-<p:sld xmlns:a="http://schemas.openxmlformats.org/drawingml/2006/main" xmlns:r="http://schemas.openxmlformats.org/officeDocument/2006/relationships" xmlns:p="http://schemas.openxmlformats.org/presentationml/2006/main">
-  <p:cSld>
-    <p:spTree>
-      <p:nvGrpSpPr>
-        <p:cNvPr id="1" name=""/>
-        <p:cNvGrpSpPr/>
-        <p:nvPr/>
-      </p:nvGrpSpPr>
-      <p:grpSpPr>
-        <a:xfrm>
-          <a:off x="0" y="0"/>
-          <a:ext cx="0" cy="0"/>
-          <a:chOff x="0" y="0"/>
-          <a:chExt cx="0" cy="0"/>
-        </a:xfrm>
-      </p:grpSpPr>
-      <p:sp>
-        <p:nvSpPr>
-          <p:cNvPr id="27650" name="제목 1">
-            <a:extLst>
-              <a:ext uri="{FF2B5EF4-FFF2-40B4-BE49-F238E27FC236}">
-                <a16:creationId xmlns:a16="http://schemas.microsoft.com/office/drawing/2014/main" id="{6B15C0CE-925D-9BF9-BAFC-FEA9583549A8}"/>
-              </a:ext>
-            </a:extLst>
-          </p:cNvPr>
-          <p:cNvSpPr>
-            <a:spLocks noGrp="1"/>
-          </p:cNvSpPr>
-          <p:nvPr>
-            <p:ph type="title"/>
-          </p:nvPr>
-        </p:nvSpPr>
-        <p:spPr/>
-        <p:txBody>
-          <a:bodyPr/>
-          <a:lstStyle/>
-          <a:p>
-            <a:r>
-              <a:rPr lang="en-US" altLang="ko-KR" b="1" u="sng"/>
-              <a:t>Thread identity</a:t>
-            </a:r>
-            <a:endParaRPr lang="ko-KR" altLang="en-US" b="1" u="sng"/>
-          </a:p>
-        </p:txBody>
-      </p:sp>
-      <p:sp>
-        <p:nvSpPr>
-          <p:cNvPr id="27651" name="내용 개체 틀 2">
-            <a:extLst>
-              <a:ext uri="{FF2B5EF4-FFF2-40B4-BE49-F238E27FC236}">
-                <a16:creationId xmlns:a16="http://schemas.microsoft.com/office/drawing/2014/main" id="{E3F000B7-AF3A-8D06-B946-C98D1947430C}"/>
-              </a:ext>
-            </a:extLst>
-          </p:cNvPr>
-          <p:cNvSpPr>
-            <a:spLocks noGrp="1"/>
-          </p:cNvSpPr>
-          <p:nvPr>
-            <p:ph idx="1"/>
-          </p:nvPr>
-        </p:nvSpPr>
-        <p:spPr/>
-        <p:txBody>
-          <a:bodyPr/>
-          <a:lstStyle/>
-          <a:p>
-            <a:r>
-              <a:rPr lang="en-US" altLang="ko-KR" sz="2800"/>
-              <a:t>Thread.currentThread()</a:t>
-            </a:r>
-          </a:p>
-          <a:p>
-            <a:pPr lvl="1"/>
-            <a:r>
-              <a:rPr lang="en-US" altLang="ko-KR" sz="2400"/>
-              <a:t>Returns reference to the running thread</a:t>
-            </a:r>
-          </a:p>
-          <a:p>
-            <a:r>
-              <a:rPr lang="en-US" altLang="ko-KR" sz="2800"/>
-              <a:t>Compare running thread with created thread</a:t>
-            </a:r>
-          </a:p>
-          <a:p>
-            <a:endParaRPr lang="en-US" altLang="ko-KR" sz="2800"/>
-          </a:p>
-          <a:p>
-            <a:pPr>
-              <a:buFont typeface="Wingdings" pitchFamily="2" charset="2"/>
-              <a:buNone/>
-            </a:pPr>
-            <a:r>
-              <a:rPr lang="en-US" altLang="ko-KR" sz="1800">
-                <a:latin typeface="Courier New" panose="02070309020205020404" pitchFamily="49" charset="0"/>
-                <a:cs typeface="Courier New" panose="02070309020205020404" pitchFamily="49" charset="0"/>
-              </a:rPr>
-              <a:t>  </a:t>
-            </a:r>
-            <a:endParaRPr lang="ko-KR" altLang="en-US" sz="2800"/>
-          </a:p>
-        </p:txBody>
-      </p:sp>
-      <p:sp>
-        <p:nvSpPr>
-          <p:cNvPr id="4" name="TextBox 3">
-            <a:extLst>
-              <a:ext uri="{FF2B5EF4-FFF2-40B4-BE49-F238E27FC236}">
-                <a16:creationId xmlns:a16="http://schemas.microsoft.com/office/drawing/2014/main" id="{647F3BF5-5E45-3167-6A78-B51801742C51}"/>
-              </a:ext>
-            </a:extLst>
-          </p:cNvPr>
-          <p:cNvSpPr txBox="1"/>
-          <p:nvPr/>
-        </p:nvSpPr>
-        <p:spPr>
-          <a:xfrm>
-            <a:off x="1331913" y="3500438"/>
-            <a:ext cx="4872037" cy="1754187"/>
-          </a:xfrm>
-          <a:prstGeom prst="rect">
-            <a:avLst/>
-          </a:prstGeom>
-          <a:solidFill>
-            <a:schemeClr val="bg2">
-              <a:lumMod val="20000"/>
-              <a:lumOff val="80000"/>
-            </a:schemeClr>
-          </a:solidFill>
-        </p:spPr>
-        <p:txBody>
-          <a:bodyPr wrap="none">
-            <a:spAutoFit/>
-          </a:bodyPr>
-          <a:lstStyle/>
-          <a:p>
-            <a:pPr>
-              <a:buFont typeface="Wingdings" pitchFamily="2" charset="2"/>
-              <a:buNone/>
-              <a:defRPr/>
-            </a:pPr>
-            <a:r>
-              <a:rPr lang="en-US" altLang="ko-KR" b="1" dirty="0">
-                <a:latin typeface="Courier New" pitchFamily="49" charset="0"/>
-                <a:ea typeface="굴림" pitchFamily="50" charset="-127"/>
-                <a:cs typeface="Courier New" pitchFamily="49" charset="0"/>
-              </a:rPr>
-              <a:t>class </a:t>
-            </a:r>
-            <a:r>
-              <a:rPr lang="en-US" altLang="ko-KR" b="1" dirty="0" err="1">
-                <a:latin typeface="Courier New" pitchFamily="49" charset="0"/>
-                <a:ea typeface="굴림" pitchFamily="50" charset="-127"/>
-                <a:cs typeface="Courier New" pitchFamily="49" charset="0"/>
-              </a:rPr>
-              <a:t>AutoRun</a:t>
-            </a:r>
-            <a:r>
-              <a:rPr lang="en-US" altLang="ko-KR" b="1" dirty="0">
-                <a:latin typeface="Courier New" pitchFamily="49" charset="0"/>
-                <a:ea typeface="굴림" pitchFamily="50" charset="-127"/>
-                <a:cs typeface="Courier New" pitchFamily="49" charset="0"/>
-              </a:rPr>
-              <a:t> implements </a:t>
-            </a:r>
-            <a:r>
-              <a:rPr lang="en-US" altLang="ko-KR" b="1" dirty="0" err="1">
-                <a:latin typeface="Courier New" pitchFamily="49" charset="0"/>
-                <a:ea typeface="굴림" pitchFamily="50" charset="-127"/>
-                <a:cs typeface="Courier New" pitchFamily="49" charset="0"/>
-              </a:rPr>
-              <a:t>Runnable</a:t>
-            </a:r>
-            <a:r>
-              <a:rPr lang="en-US" altLang="ko-KR" b="1" dirty="0">
-                <a:latin typeface="Courier New" pitchFamily="49" charset="0"/>
-                <a:ea typeface="굴림" pitchFamily="50" charset="-127"/>
-                <a:cs typeface="Courier New" pitchFamily="49" charset="0"/>
-              </a:rPr>
-              <a:t>{</a:t>
-            </a:r>
-          </a:p>
-          <a:p>
-            <a:pPr>
-              <a:buFont typeface="Wingdings" pitchFamily="2" charset="2"/>
-              <a:buNone/>
-              <a:defRPr/>
-            </a:pPr>
-            <a:r>
-              <a:rPr lang="en-US" altLang="ko-KR" b="1" dirty="0">
-                <a:latin typeface="Courier New" pitchFamily="49" charset="0"/>
-                <a:ea typeface="굴림" pitchFamily="50" charset="-127"/>
-                <a:cs typeface="Courier New" pitchFamily="49" charset="0"/>
-              </a:rPr>
-              <a:t>    private Thread _me;</a:t>
-            </a:r>
-          </a:p>
-          <a:p>
-            <a:pPr>
-              <a:buFont typeface="Wingdings" pitchFamily="2" charset="2"/>
-              <a:buNone/>
-              <a:defRPr/>
-            </a:pPr>
-            <a:r>
-              <a:rPr lang="en-US" altLang="ko-KR" b="1" dirty="0">
-                <a:latin typeface="Courier New" pitchFamily="49" charset="0"/>
-                <a:ea typeface="굴림" pitchFamily="50" charset="-127"/>
-                <a:cs typeface="Courier New" pitchFamily="49" charset="0"/>
-              </a:rPr>
-              <a:t>    public </a:t>
-            </a:r>
-            <a:r>
-              <a:rPr lang="en-US" altLang="ko-KR" b="1" dirty="0" err="1">
-                <a:latin typeface="Courier New" pitchFamily="49" charset="0"/>
-                <a:ea typeface="굴림" pitchFamily="50" charset="-127"/>
-                <a:cs typeface="Courier New" pitchFamily="49" charset="0"/>
-              </a:rPr>
-              <a:t>AutoRun</a:t>
-            </a:r>
-            <a:r>
-              <a:rPr lang="en-US" altLang="ko-KR" b="1" dirty="0">
-                <a:latin typeface="Courier New" pitchFamily="49" charset="0"/>
-                <a:ea typeface="굴림" pitchFamily="50" charset="-127"/>
-                <a:cs typeface="Courier New" pitchFamily="49" charset="0"/>
-              </a:rPr>
-              <a:t>() {</a:t>
-            </a:r>
-          </a:p>
-          <a:p>
-            <a:pPr>
-              <a:buFont typeface="Wingdings" pitchFamily="2" charset="2"/>
-              <a:buNone/>
-              <a:defRPr/>
-            </a:pPr>
-            <a:r>
-              <a:rPr lang="en-US" altLang="ko-KR" b="1" dirty="0">
-                <a:latin typeface="Courier New" pitchFamily="49" charset="0"/>
-                <a:ea typeface="굴림" pitchFamily="50" charset="-127"/>
-                <a:cs typeface="Courier New" pitchFamily="49" charset="0"/>
-              </a:rPr>
-              <a:t>      _me = new Thread(this);</a:t>
-            </a:r>
-          </a:p>
-          <a:p>
-            <a:pPr>
-              <a:buFont typeface="Wingdings" pitchFamily="2" charset="2"/>
-              <a:buNone/>
-              <a:defRPr/>
-            </a:pPr>
-            <a:r>
-              <a:rPr lang="en-US" altLang="ko-KR" b="1" dirty="0">
-                <a:latin typeface="Courier New" pitchFamily="49" charset="0"/>
-                <a:ea typeface="굴림" pitchFamily="50" charset="-127"/>
-                <a:cs typeface="Courier New" pitchFamily="49" charset="0"/>
-              </a:rPr>
-              <a:t>      _</a:t>
-            </a:r>
-            <a:r>
-              <a:rPr lang="en-US" altLang="ko-KR" b="1" dirty="0" err="1">
-                <a:latin typeface="Courier New" pitchFamily="49" charset="0"/>
-                <a:ea typeface="굴림" pitchFamily="50" charset="-127"/>
-                <a:cs typeface="Courier New" pitchFamily="49" charset="0"/>
-              </a:rPr>
-              <a:t>me.start</a:t>
-            </a:r>
-            <a:r>
-              <a:rPr lang="en-US" altLang="ko-KR" b="1" dirty="0">
-                <a:latin typeface="Courier New" pitchFamily="49" charset="0"/>
-                <a:ea typeface="굴림" pitchFamily="50" charset="-127"/>
-                <a:cs typeface="Courier New" pitchFamily="49" charset="0"/>
-              </a:rPr>
-              <a:t>();</a:t>
-            </a:r>
-          </a:p>
-          <a:p>
-            <a:pPr>
-              <a:buFont typeface="Wingdings" pitchFamily="2" charset="2"/>
-              <a:buNone/>
-              <a:defRPr/>
-            </a:pPr>
-            <a:r>
-              <a:rPr lang="en-US" altLang="ko-KR" b="1" dirty="0">
-                <a:latin typeface="Courier New" pitchFamily="49" charset="0"/>
-                <a:ea typeface="굴림" pitchFamily="50" charset="-127"/>
-                <a:cs typeface="Courier New" pitchFamily="49" charset="0"/>
-              </a:rPr>
-              <a:t>    }</a:t>
-            </a:r>
-            <a:endParaRPr lang="ko-KR" altLang="en-US" b="1" dirty="0">
-              <a:latin typeface="굴림" pitchFamily="50" charset="-127"/>
-              <a:ea typeface="굴림" pitchFamily="50" charset="-127"/>
-            </a:endParaRPr>
-          </a:p>
-        </p:txBody>
-      </p:sp>
     </p:spTree>
   </p:cSld>
   <p:clrMapOvr>
@@ -14263,6 +14209,310 @@
       </p:grpSpPr>
       <p:sp>
         <p:nvSpPr>
+          <p:cNvPr id="27650" name="제목 1">
+            <a:extLst>
+              <a:ext uri="{FF2B5EF4-FFF2-40B4-BE49-F238E27FC236}">
+                <a16:creationId xmlns:a16="http://schemas.microsoft.com/office/drawing/2014/main" id="{6B15C0CE-925D-9BF9-BAFC-FEA9583549A8}"/>
+              </a:ext>
+            </a:extLst>
+          </p:cNvPr>
+          <p:cNvSpPr>
+            <a:spLocks noGrp="1"/>
+          </p:cNvSpPr>
+          <p:nvPr>
+            <p:ph type="title"/>
+          </p:nvPr>
+        </p:nvSpPr>
+        <p:spPr/>
+        <p:txBody>
+          <a:bodyPr/>
+          <a:lstStyle/>
+          <a:p>
+            <a:r>
+              <a:rPr lang="en-US" altLang="ko-KR" b="1" u="sng"/>
+              <a:t>Thread identity</a:t>
+            </a:r>
+            <a:endParaRPr lang="ko-KR" altLang="en-US" b="1" u="sng"/>
+          </a:p>
+        </p:txBody>
+      </p:sp>
+      <p:sp>
+        <p:nvSpPr>
+          <p:cNvPr id="27651" name="내용 개체 틀 2">
+            <a:extLst>
+              <a:ext uri="{FF2B5EF4-FFF2-40B4-BE49-F238E27FC236}">
+                <a16:creationId xmlns:a16="http://schemas.microsoft.com/office/drawing/2014/main" id="{E3F000B7-AF3A-8D06-B946-C98D1947430C}"/>
+              </a:ext>
+            </a:extLst>
+          </p:cNvPr>
+          <p:cNvSpPr>
+            <a:spLocks noGrp="1"/>
+          </p:cNvSpPr>
+          <p:nvPr>
+            <p:ph idx="1"/>
+          </p:nvPr>
+        </p:nvSpPr>
+        <p:spPr/>
+        <p:txBody>
+          <a:bodyPr/>
+          <a:lstStyle/>
+          <a:p>
+            <a:r>
+              <a:rPr lang="en-US" altLang="ko-KR" sz="2800"/>
+              <a:t>Thread.currentThread()</a:t>
+            </a:r>
+          </a:p>
+          <a:p>
+            <a:pPr lvl="1"/>
+            <a:r>
+              <a:rPr lang="en-US" altLang="ko-KR" sz="2400"/>
+              <a:t>Returns reference to the running thread</a:t>
+            </a:r>
+          </a:p>
+          <a:p>
+            <a:r>
+              <a:rPr lang="en-US" altLang="ko-KR" sz="2800"/>
+              <a:t>Compare running thread with created thread</a:t>
+            </a:r>
+          </a:p>
+          <a:p>
+            <a:endParaRPr lang="en-US" altLang="ko-KR" sz="2800"/>
+          </a:p>
+          <a:p>
+            <a:pPr>
+              <a:buFont typeface="Wingdings" pitchFamily="2" charset="2"/>
+              <a:buNone/>
+            </a:pPr>
+            <a:r>
+              <a:rPr lang="en-US" altLang="ko-KR" sz="1800">
+                <a:latin typeface="Courier New" panose="02070309020205020404" pitchFamily="49" charset="0"/>
+                <a:cs typeface="Courier New" panose="02070309020205020404" pitchFamily="49" charset="0"/>
+              </a:rPr>
+              <a:t>  </a:t>
+            </a:r>
+            <a:endParaRPr lang="ko-KR" altLang="en-US" sz="2800"/>
+          </a:p>
+        </p:txBody>
+      </p:sp>
+      <p:sp>
+        <p:nvSpPr>
+          <p:cNvPr id="4" name="TextBox 3">
+            <a:extLst>
+              <a:ext uri="{FF2B5EF4-FFF2-40B4-BE49-F238E27FC236}">
+                <a16:creationId xmlns:a16="http://schemas.microsoft.com/office/drawing/2014/main" id="{647F3BF5-5E45-3167-6A78-B51801742C51}"/>
+              </a:ext>
+            </a:extLst>
+          </p:cNvPr>
+          <p:cNvSpPr txBox="1"/>
+          <p:nvPr/>
+        </p:nvSpPr>
+        <p:spPr>
+          <a:xfrm>
+            <a:off x="1331913" y="3500438"/>
+            <a:ext cx="4872037" cy="1754187"/>
+          </a:xfrm>
+          <a:prstGeom prst="rect">
+            <a:avLst/>
+          </a:prstGeom>
+          <a:solidFill>
+            <a:schemeClr val="bg2">
+              <a:lumMod val="20000"/>
+              <a:lumOff val="80000"/>
+            </a:schemeClr>
+          </a:solidFill>
+        </p:spPr>
+        <p:txBody>
+          <a:bodyPr wrap="none">
+            <a:spAutoFit/>
+          </a:bodyPr>
+          <a:lstStyle/>
+          <a:p>
+            <a:pPr>
+              <a:buFont typeface="Wingdings" pitchFamily="2" charset="2"/>
+              <a:buNone/>
+              <a:defRPr/>
+            </a:pPr>
+            <a:r>
+              <a:rPr lang="en-US" altLang="ko-KR" b="1" dirty="0">
+                <a:latin typeface="Courier New" pitchFamily="49" charset="0"/>
+                <a:ea typeface="굴림" pitchFamily="50" charset="-127"/>
+                <a:cs typeface="Courier New" pitchFamily="49" charset="0"/>
+              </a:rPr>
+              <a:t>class </a:t>
+            </a:r>
+            <a:r>
+              <a:rPr lang="en-US" altLang="ko-KR" b="1" dirty="0" err="1">
+                <a:latin typeface="Courier New" pitchFamily="49" charset="0"/>
+                <a:ea typeface="굴림" pitchFamily="50" charset="-127"/>
+                <a:cs typeface="Courier New" pitchFamily="49" charset="0"/>
+              </a:rPr>
+              <a:t>AutoRun</a:t>
+            </a:r>
+            <a:r>
+              <a:rPr lang="en-US" altLang="ko-KR" b="1" dirty="0">
+                <a:latin typeface="Courier New" pitchFamily="49" charset="0"/>
+                <a:ea typeface="굴림" pitchFamily="50" charset="-127"/>
+                <a:cs typeface="Courier New" pitchFamily="49" charset="0"/>
+              </a:rPr>
+              <a:t> implements </a:t>
+            </a:r>
+            <a:r>
+              <a:rPr lang="en-US" altLang="ko-KR" b="1" dirty="0" err="1">
+                <a:latin typeface="Courier New" pitchFamily="49" charset="0"/>
+                <a:ea typeface="굴림" pitchFamily="50" charset="-127"/>
+                <a:cs typeface="Courier New" pitchFamily="49" charset="0"/>
+              </a:rPr>
+              <a:t>Runnable</a:t>
+            </a:r>
+            <a:r>
+              <a:rPr lang="en-US" altLang="ko-KR" b="1" dirty="0">
+                <a:latin typeface="Courier New" pitchFamily="49" charset="0"/>
+                <a:ea typeface="굴림" pitchFamily="50" charset="-127"/>
+                <a:cs typeface="Courier New" pitchFamily="49" charset="0"/>
+              </a:rPr>
+              <a:t>{</a:t>
+            </a:r>
+          </a:p>
+          <a:p>
+            <a:pPr>
+              <a:buFont typeface="Wingdings" pitchFamily="2" charset="2"/>
+              <a:buNone/>
+              <a:defRPr/>
+            </a:pPr>
+            <a:r>
+              <a:rPr lang="en-US" altLang="ko-KR" b="1" dirty="0">
+                <a:latin typeface="Courier New" pitchFamily="49" charset="0"/>
+                <a:ea typeface="굴림" pitchFamily="50" charset="-127"/>
+                <a:cs typeface="Courier New" pitchFamily="49" charset="0"/>
+              </a:rPr>
+              <a:t>    private Thread _me;</a:t>
+            </a:r>
+          </a:p>
+          <a:p>
+            <a:pPr>
+              <a:buFont typeface="Wingdings" pitchFamily="2" charset="2"/>
+              <a:buNone/>
+              <a:defRPr/>
+            </a:pPr>
+            <a:r>
+              <a:rPr lang="en-US" altLang="ko-KR" b="1" dirty="0">
+                <a:latin typeface="Courier New" pitchFamily="49" charset="0"/>
+                <a:ea typeface="굴림" pitchFamily="50" charset="-127"/>
+                <a:cs typeface="Courier New" pitchFamily="49" charset="0"/>
+              </a:rPr>
+              <a:t>    public </a:t>
+            </a:r>
+            <a:r>
+              <a:rPr lang="en-US" altLang="ko-KR" b="1" dirty="0" err="1">
+                <a:latin typeface="Courier New" pitchFamily="49" charset="0"/>
+                <a:ea typeface="굴림" pitchFamily="50" charset="-127"/>
+                <a:cs typeface="Courier New" pitchFamily="49" charset="0"/>
+              </a:rPr>
+              <a:t>AutoRun</a:t>
+            </a:r>
+            <a:r>
+              <a:rPr lang="en-US" altLang="ko-KR" b="1" dirty="0">
+                <a:latin typeface="Courier New" pitchFamily="49" charset="0"/>
+                <a:ea typeface="굴림" pitchFamily="50" charset="-127"/>
+                <a:cs typeface="Courier New" pitchFamily="49" charset="0"/>
+              </a:rPr>
+              <a:t>() {</a:t>
+            </a:r>
+          </a:p>
+          <a:p>
+            <a:pPr>
+              <a:buFont typeface="Wingdings" pitchFamily="2" charset="2"/>
+              <a:buNone/>
+              <a:defRPr/>
+            </a:pPr>
+            <a:r>
+              <a:rPr lang="en-US" altLang="ko-KR" b="1" dirty="0">
+                <a:latin typeface="Courier New" pitchFamily="49" charset="0"/>
+                <a:ea typeface="굴림" pitchFamily="50" charset="-127"/>
+                <a:cs typeface="Courier New" pitchFamily="49" charset="0"/>
+              </a:rPr>
+              <a:t>      _me = new Thread(this);</a:t>
+            </a:r>
+          </a:p>
+          <a:p>
+            <a:pPr>
+              <a:buFont typeface="Wingdings" pitchFamily="2" charset="2"/>
+              <a:buNone/>
+              <a:defRPr/>
+            </a:pPr>
+            <a:r>
+              <a:rPr lang="en-US" altLang="ko-KR" b="1" dirty="0">
+                <a:latin typeface="Courier New" pitchFamily="49" charset="0"/>
+                <a:ea typeface="굴림" pitchFamily="50" charset="-127"/>
+                <a:cs typeface="Courier New" pitchFamily="49" charset="0"/>
+              </a:rPr>
+              <a:t>      _</a:t>
+            </a:r>
+            <a:r>
+              <a:rPr lang="en-US" altLang="ko-KR" b="1" dirty="0" err="1">
+                <a:latin typeface="Courier New" pitchFamily="49" charset="0"/>
+                <a:ea typeface="굴림" pitchFamily="50" charset="-127"/>
+                <a:cs typeface="Courier New" pitchFamily="49" charset="0"/>
+              </a:rPr>
+              <a:t>me.start</a:t>
+            </a:r>
+            <a:r>
+              <a:rPr lang="en-US" altLang="ko-KR" b="1" dirty="0">
+                <a:latin typeface="Courier New" pitchFamily="49" charset="0"/>
+                <a:ea typeface="굴림" pitchFamily="50" charset="-127"/>
+                <a:cs typeface="Courier New" pitchFamily="49" charset="0"/>
+              </a:rPr>
+              <a:t>();</a:t>
+            </a:r>
+          </a:p>
+          <a:p>
+            <a:pPr>
+              <a:buFont typeface="Wingdings" pitchFamily="2" charset="2"/>
+              <a:buNone/>
+              <a:defRPr/>
+            </a:pPr>
+            <a:r>
+              <a:rPr lang="en-US" altLang="ko-KR" b="1" dirty="0">
+                <a:latin typeface="Courier New" pitchFamily="49" charset="0"/>
+                <a:ea typeface="굴림" pitchFamily="50" charset="-127"/>
+                <a:cs typeface="Courier New" pitchFamily="49" charset="0"/>
+              </a:rPr>
+              <a:t>    }</a:t>
+            </a:r>
+            <a:endParaRPr lang="ko-KR" altLang="en-US" b="1" dirty="0">
+              <a:latin typeface="굴림" pitchFamily="50" charset="-127"/>
+              <a:ea typeface="굴림" pitchFamily="50" charset="-127"/>
+            </a:endParaRPr>
+          </a:p>
+        </p:txBody>
+      </p:sp>
+    </p:spTree>
+  </p:cSld>
+  <p:clrMapOvr>
+    <a:masterClrMapping/>
+  </p:clrMapOvr>
+</p:sld>
+</file>
+
+<file path=ppt/slides/slide31.xml><?xml version="1.0" encoding="utf-8"?>
+<p:sld xmlns:a="http://schemas.openxmlformats.org/drawingml/2006/main" xmlns:r="http://schemas.openxmlformats.org/officeDocument/2006/relationships" xmlns:p="http://schemas.openxmlformats.org/presentationml/2006/main">
+  <p:cSld>
+    <p:spTree>
+      <p:nvGrpSpPr>
+        <p:cNvPr id="1" name=""/>
+        <p:cNvGrpSpPr/>
+        <p:nvPr/>
+      </p:nvGrpSpPr>
+      <p:grpSpPr>
+        <a:xfrm>
+          <a:off x="0" y="0"/>
+          <a:ext cx="0" cy="0"/>
+          <a:chOff x="0" y="0"/>
+          <a:chExt cx="0" cy="0"/>
+        </a:xfrm>
+      </p:grpSpPr>
+      <p:sp>
+        <p:nvSpPr>
           <p:cNvPr id="28674" name="제목 1">
             <a:extLst>
               <a:ext uri="{FF2B5EF4-FFF2-40B4-BE49-F238E27FC236}">
@@ -14628,7 +14878,7 @@
 </p:sld>
 </file>
 
-<file path=ppt/slides/slide31.xml><?xml version="1.0" encoding="utf-8"?>
+<file path=ppt/slides/slide32.xml><?xml version="1.0" encoding="utf-8"?>
 <p:sld xmlns:a="http://schemas.openxmlformats.org/drawingml/2006/main" xmlns:r="http://schemas.openxmlformats.org/officeDocument/2006/relationships" xmlns:p="http://schemas.openxmlformats.org/presentationml/2006/main">
   <p:cSld>
     <p:spTree>
@@ -14741,7 +14991,7 @@
 </p:sld>
 </file>
 
-<file path=ppt/slides/slide32.xml><?xml version="1.0" encoding="utf-8"?>
+<file path=ppt/slides/slide33.xml><?xml version="1.0" encoding="utf-8"?>
 <p:sld xmlns:a="http://schemas.openxmlformats.org/drawingml/2006/main" xmlns:r="http://schemas.openxmlformats.org/officeDocument/2006/relationships" xmlns:p="http://schemas.openxmlformats.org/presentationml/2006/main">
   <p:cSld>
     <p:spTree>
@@ -14888,7 +15138,7 @@
 </p:sld>
 </file>
 
-<file path=ppt/slides/slide33.xml><?xml version="1.0" encoding="utf-8"?>
+<file path=ppt/slides/slide34.xml><?xml version="1.0" encoding="utf-8"?>
 <p:sld xmlns:a="http://schemas.openxmlformats.org/drawingml/2006/main" xmlns:r="http://schemas.openxmlformats.org/officeDocument/2006/relationships" xmlns:p="http://schemas.openxmlformats.org/presentationml/2006/main">
   <p:cSld>
     <p:spTree>
@@ -15285,7 +15535,7 @@
 </p:sld>
 </file>
 
-<file path=ppt/slides/slide34.xml><?xml version="1.0" encoding="utf-8"?>
+<file path=ppt/slides/slide35.xml><?xml version="1.0" encoding="utf-8"?>
 <p:sld xmlns:a="http://schemas.openxmlformats.org/drawingml/2006/main" xmlns:r="http://schemas.openxmlformats.org/officeDocument/2006/relationships" xmlns:p="http://schemas.openxmlformats.org/presentationml/2006/main">
   <p:cSld>
     <p:spTree>
@@ -15699,7 +15949,7 @@
 </p:sld>
 </file>
 
-<file path=ppt/slides/slide35.xml><?xml version="1.0" encoding="utf-8"?>
+<file path=ppt/slides/slide36.xml><?xml version="1.0" encoding="utf-8"?>
 <p:sld xmlns:a="http://schemas.openxmlformats.org/drawingml/2006/main" xmlns:r="http://schemas.openxmlformats.org/officeDocument/2006/relationships" xmlns:p="http://schemas.openxmlformats.org/presentationml/2006/main">
   <p:cSld>
     <p:spTree>
@@ -16033,7 +16283,7 @@
 </p:sld>
 </file>
 
-<file path=ppt/slides/slide36.xml><?xml version="1.0" encoding="utf-8"?>
+<file path=ppt/slides/slide37.xml><?xml version="1.0" encoding="utf-8"?>
 <p:sld xmlns:a="http://schemas.openxmlformats.org/drawingml/2006/main" xmlns:r="http://schemas.openxmlformats.org/officeDocument/2006/relationships" xmlns:p="http://schemas.openxmlformats.org/presentationml/2006/main">
   <p:cSld>
     <p:spTree>
@@ -16414,7 +16664,7 @@
 </p:sld>
 </file>
 
-<file path=ppt/slides/slide37.xml><?xml version="1.0" encoding="utf-8"?>
+<file path=ppt/slides/slide38.xml><?xml version="1.0" encoding="utf-8"?>
 <p:sld xmlns:a="http://schemas.openxmlformats.org/drawingml/2006/main" xmlns:r="http://schemas.openxmlformats.org/officeDocument/2006/relationships" xmlns:p="http://schemas.openxmlformats.org/presentationml/2006/main">
   <p:cSld>
     <p:spTree>
@@ -16641,7 +16891,7 @@
 </p:sld>
 </file>
 
-<file path=ppt/slides/slide38.xml><?xml version="1.0" encoding="utf-8"?>
+<file path=ppt/slides/slide39.xml><?xml version="1.0" encoding="utf-8"?>
 <p:sld xmlns:a="http://schemas.openxmlformats.org/drawingml/2006/main" xmlns:r="http://schemas.openxmlformats.org/officeDocument/2006/relationships" xmlns:p="http://schemas.openxmlformats.org/presentationml/2006/main">
   <p:cSld>
     <p:spTree>
@@ -16774,265 +17024,6 @@
           </a:p>
           <a:p>
             <a:endParaRPr lang="ko-KR" altLang="en-US"/>
-          </a:p>
-        </p:txBody>
-      </p:sp>
-    </p:spTree>
-  </p:cSld>
-  <p:clrMapOvr>
-    <a:masterClrMapping/>
-  </p:clrMapOvr>
-</p:sld>
-</file>
-
-<file path=ppt/slides/slide39.xml><?xml version="1.0" encoding="utf-8"?>
-<p:sld xmlns:a="http://schemas.openxmlformats.org/drawingml/2006/main" xmlns:r="http://schemas.openxmlformats.org/officeDocument/2006/relationships" xmlns:p="http://schemas.openxmlformats.org/presentationml/2006/main">
-  <p:cSld>
-    <p:spTree>
-      <p:nvGrpSpPr>
-        <p:cNvPr id="1" name=""/>
-        <p:cNvGrpSpPr/>
-        <p:nvPr/>
-      </p:nvGrpSpPr>
-      <p:grpSpPr>
-        <a:xfrm>
-          <a:off x="0" y="0"/>
-          <a:ext cx="0" cy="0"/>
-          <a:chOff x="0" y="0"/>
-          <a:chExt cx="0" cy="0"/>
-        </a:xfrm>
-      </p:grpSpPr>
-      <p:sp>
-        <p:nvSpPr>
-          <p:cNvPr id="37890" name="제목 1">
-            <a:extLst>
-              <a:ext uri="{FF2B5EF4-FFF2-40B4-BE49-F238E27FC236}">
-                <a16:creationId xmlns:a16="http://schemas.microsoft.com/office/drawing/2014/main" id="{3012945B-2EF2-AD98-72C1-1B567DD9C33A}"/>
-              </a:ext>
-            </a:extLst>
-          </p:cNvPr>
-          <p:cNvSpPr>
-            <a:spLocks noGrp="1"/>
-          </p:cNvSpPr>
-          <p:nvPr>
-            <p:ph type="title"/>
-          </p:nvPr>
-        </p:nvSpPr>
-        <p:spPr/>
-        <p:txBody>
-          <a:bodyPr/>
-          <a:lstStyle/>
-          <a:p>
-            <a:r>
-              <a:rPr lang="en-US" altLang="ko-KR" b="1" u="sng"/>
-              <a:t>Race condition example</a:t>
-            </a:r>
-            <a:endParaRPr lang="ko-KR" altLang="en-US" b="1" u="sng"/>
-          </a:p>
-        </p:txBody>
-      </p:sp>
-      <p:sp>
-        <p:nvSpPr>
-          <p:cNvPr id="36867" name="내용 개체 틀 2">
-            <a:extLst>
-              <a:ext uri="{FF2B5EF4-FFF2-40B4-BE49-F238E27FC236}">
-                <a16:creationId xmlns:a16="http://schemas.microsoft.com/office/drawing/2014/main" id="{9F4A6CF3-074A-3774-1421-B2154F2E85B8}"/>
-              </a:ext>
-            </a:extLst>
-          </p:cNvPr>
-          <p:cNvSpPr>
-            <a:spLocks noGrp="1"/>
-          </p:cNvSpPr>
-          <p:nvPr>
-            <p:ph idx="1"/>
-          </p:nvPr>
-        </p:nvSpPr>
-        <p:spPr>
-          <a:xfrm>
-            <a:off x="395288" y="1628775"/>
-            <a:ext cx="8229600" cy="3600450"/>
-          </a:xfrm>
-          <a:solidFill>
-            <a:schemeClr val="bg2">
-              <a:lumMod val="20000"/>
-              <a:lumOff val="80000"/>
-            </a:schemeClr>
-          </a:solidFill>
-          <a:ln>
-            <a:solidFill>
-              <a:schemeClr val="tx1"/>
-            </a:solidFill>
-          </a:ln>
-        </p:spPr>
-        <p:txBody>
-          <a:bodyPr/>
-          <a:lstStyle/>
-          <a:p>
-            <a:pPr>
-              <a:defRPr/>
-            </a:pPr>
-            <a:endParaRPr lang="ko-KR" altLang="en-US" sz="2400" dirty="0">
-              <a:latin typeface="Courier New" pitchFamily="49" charset="0"/>
-              <a:cs typeface="Courier New" pitchFamily="49" charset="0"/>
-            </a:endParaRPr>
-          </a:p>
-          <a:p>
-            <a:pPr>
-              <a:buFont typeface="Wingdings" pitchFamily="2" charset="2"/>
-              <a:buNone/>
-              <a:defRPr/>
-            </a:pPr>
-            <a:r>
-              <a:rPr lang="en-US" altLang="ko-KR" sz="2400" b="1" dirty="0">
-                <a:latin typeface="Courier New" pitchFamily="49" charset="0"/>
-                <a:cs typeface="Courier New" pitchFamily="49" charset="0"/>
-              </a:rPr>
-              <a:t>class Account {</a:t>
-            </a:r>
-          </a:p>
-          <a:p>
-            <a:pPr>
-              <a:buFont typeface="Wingdings" pitchFamily="2" charset="2"/>
-              <a:buNone/>
-              <a:defRPr/>
-            </a:pPr>
-            <a:r>
-              <a:rPr lang="en-US" altLang="ko-KR" sz="2400" b="1" dirty="0">
-                <a:latin typeface="Courier New" pitchFamily="49" charset="0"/>
-                <a:cs typeface="Courier New" pitchFamily="49" charset="0"/>
-              </a:rPr>
-              <a:t>  </a:t>
-            </a:r>
-            <a:r>
-              <a:rPr lang="en-US" altLang="ko-KR" sz="2400" b="1" dirty="0" err="1">
-                <a:latin typeface="Courier New" pitchFamily="49" charset="0"/>
-                <a:cs typeface="Courier New" pitchFamily="49" charset="0"/>
-              </a:rPr>
-              <a:t>int</a:t>
-            </a:r>
-            <a:r>
-              <a:rPr lang="en-US" altLang="ko-KR" sz="2400" b="1" dirty="0">
-                <a:latin typeface="Courier New" pitchFamily="49" charset="0"/>
-                <a:cs typeface="Courier New" pitchFamily="49" charset="0"/>
-              </a:rPr>
-              <a:t> balance;</a:t>
-            </a:r>
-          </a:p>
-          <a:p>
-            <a:pPr>
-              <a:buFont typeface="Wingdings" pitchFamily="2" charset="2"/>
-              <a:buNone/>
-              <a:defRPr/>
-            </a:pPr>
-            <a:r>
-              <a:rPr lang="en-US" altLang="ko-KR" sz="2400" b="1" dirty="0">
-                <a:latin typeface="Courier New" pitchFamily="49" charset="0"/>
-                <a:cs typeface="Courier New" pitchFamily="49" charset="0"/>
-              </a:rPr>
-              <a:t>  public void deposit(</a:t>
-            </a:r>
-            <a:r>
-              <a:rPr lang="en-US" altLang="ko-KR" sz="2400" b="1" dirty="0" err="1">
-                <a:latin typeface="Courier New" pitchFamily="49" charset="0"/>
-                <a:cs typeface="Courier New" pitchFamily="49" charset="0"/>
-              </a:rPr>
-              <a:t>int</a:t>
-            </a:r>
-            <a:r>
-              <a:rPr lang="en-US" altLang="ko-KR" sz="2400" b="1" dirty="0">
-                <a:latin typeface="Courier New" pitchFamily="49" charset="0"/>
-                <a:cs typeface="Courier New" pitchFamily="49" charset="0"/>
-              </a:rPr>
-              <a:t> </a:t>
-            </a:r>
-            <a:r>
-              <a:rPr lang="en-US" altLang="ko-KR" sz="2400" b="1" dirty="0" err="1">
-                <a:latin typeface="Courier New" pitchFamily="49" charset="0"/>
-                <a:cs typeface="Courier New" pitchFamily="49" charset="0"/>
-              </a:rPr>
-              <a:t>val</a:t>
-            </a:r>
-            <a:r>
-              <a:rPr lang="en-US" altLang="ko-KR" sz="2400" b="1" dirty="0">
-                <a:latin typeface="Courier New" pitchFamily="49" charset="0"/>
-                <a:cs typeface="Courier New" pitchFamily="49" charset="0"/>
-              </a:rPr>
-              <a:t>)</a:t>
-            </a:r>
-          </a:p>
-          <a:p>
-            <a:pPr>
-              <a:buFont typeface="Wingdings" pitchFamily="2" charset="2"/>
-              <a:buNone/>
-              <a:defRPr/>
-            </a:pPr>
-            <a:r>
-              <a:rPr lang="en-US" altLang="ko-KR" sz="2400" b="1" dirty="0">
-                <a:latin typeface="Courier New" pitchFamily="49" charset="0"/>
-                <a:cs typeface="Courier New" pitchFamily="49" charset="0"/>
-              </a:rPr>
-              <a:t>  {</a:t>
-            </a:r>
-          </a:p>
-          <a:p>
-            <a:pPr>
-              <a:buFont typeface="Wingdings" pitchFamily="2" charset="2"/>
-              <a:buNone/>
-              <a:defRPr/>
-            </a:pPr>
-            <a:r>
-              <a:rPr lang="en-US" altLang="ko-KR" sz="2400" b="1" dirty="0">
-                <a:latin typeface="Courier New" pitchFamily="49" charset="0"/>
-                <a:cs typeface="Courier New" pitchFamily="49" charset="0"/>
-              </a:rPr>
-              <a:t>    balance = balance + </a:t>
-            </a:r>
-            <a:r>
-              <a:rPr lang="en-US" altLang="ko-KR" sz="2400" b="1" dirty="0" err="1">
-                <a:latin typeface="Courier New" pitchFamily="49" charset="0"/>
-                <a:cs typeface="Courier New" pitchFamily="49" charset="0"/>
-              </a:rPr>
-              <a:t>val</a:t>
-            </a:r>
-            <a:r>
-              <a:rPr lang="en-US" altLang="ko-KR" sz="2400" b="1" dirty="0">
-                <a:latin typeface="Courier New" pitchFamily="49" charset="0"/>
-                <a:cs typeface="Courier New" pitchFamily="49" charset="0"/>
-              </a:rPr>
-              <a:t>;</a:t>
-            </a:r>
-          </a:p>
-          <a:p>
-            <a:pPr>
-              <a:buFont typeface="Wingdings" pitchFamily="2" charset="2"/>
-              <a:buNone/>
-              <a:defRPr/>
-            </a:pPr>
-            <a:r>
-              <a:rPr lang="en-US" altLang="ko-KR" sz="2400" b="1" dirty="0">
-                <a:latin typeface="Courier New" pitchFamily="49" charset="0"/>
-                <a:cs typeface="Courier New" pitchFamily="49" charset="0"/>
-              </a:rPr>
-              <a:t>  }</a:t>
-            </a:r>
-          </a:p>
-          <a:p>
-            <a:pPr>
-              <a:buFont typeface="Wingdings" pitchFamily="2" charset="2"/>
-              <a:buNone/>
-              <a:defRPr/>
-            </a:pPr>
-            <a:r>
-              <a:rPr lang="en-US" altLang="ko-KR" sz="2400" b="1" dirty="0">
-                <a:latin typeface="Courier New" pitchFamily="49" charset="0"/>
-                <a:cs typeface="Courier New" pitchFamily="49" charset="0"/>
-              </a:rPr>
-              <a:t>}</a:t>
-            </a:r>
-            <a:endParaRPr lang="ko-KR" altLang="en-US" sz="2400" dirty="0">
-              <a:latin typeface="Courier New" pitchFamily="49" charset="0"/>
-              <a:cs typeface="Courier New" pitchFamily="49" charset="0"/>
-            </a:endParaRPr>
           </a:p>
         </p:txBody>
       </p:sp>
@@ -17152,6 +17143,265 @@
 </file>
 
 <file path=ppt/slides/slide40.xml><?xml version="1.0" encoding="utf-8"?>
+<p:sld xmlns:a="http://schemas.openxmlformats.org/drawingml/2006/main" xmlns:r="http://schemas.openxmlformats.org/officeDocument/2006/relationships" xmlns:p="http://schemas.openxmlformats.org/presentationml/2006/main">
+  <p:cSld>
+    <p:spTree>
+      <p:nvGrpSpPr>
+        <p:cNvPr id="1" name=""/>
+        <p:cNvGrpSpPr/>
+        <p:nvPr/>
+      </p:nvGrpSpPr>
+      <p:grpSpPr>
+        <a:xfrm>
+          <a:off x="0" y="0"/>
+          <a:ext cx="0" cy="0"/>
+          <a:chOff x="0" y="0"/>
+          <a:chExt cx="0" cy="0"/>
+        </a:xfrm>
+      </p:grpSpPr>
+      <p:sp>
+        <p:nvSpPr>
+          <p:cNvPr id="37890" name="제목 1">
+            <a:extLst>
+              <a:ext uri="{FF2B5EF4-FFF2-40B4-BE49-F238E27FC236}">
+                <a16:creationId xmlns:a16="http://schemas.microsoft.com/office/drawing/2014/main" id="{3012945B-2EF2-AD98-72C1-1B567DD9C33A}"/>
+              </a:ext>
+            </a:extLst>
+          </p:cNvPr>
+          <p:cNvSpPr>
+            <a:spLocks noGrp="1"/>
+          </p:cNvSpPr>
+          <p:nvPr>
+            <p:ph type="title"/>
+          </p:nvPr>
+        </p:nvSpPr>
+        <p:spPr/>
+        <p:txBody>
+          <a:bodyPr/>
+          <a:lstStyle/>
+          <a:p>
+            <a:r>
+              <a:rPr lang="en-US" altLang="ko-KR" b="1" u="sng"/>
+              <a:t>Race condition example</a:t>
+            </a:r>
+            <a:endParaRPr lang="ko-KR" altLang="en-US" b="1" u="sng"/>
+          </a:p>
+        </p:txBody>
+      </p:sp>
+      <p:sp>
+        <p:nvSpPr>
+          <p:cNvPr id="36867" name="내용 개체 틀 2">
+            <a:extLst>
+              <a:ext uri="{FF2B5EF4-FFF2-40B4-BE49-F238E27FC236}">
+                <a16:creationId xmlns:a16="http://schemas.microsoft.com/office/drawing/2014/main" id="{9F4A6CF3-074A-3774-1421-B2154F2E85B8}"/>
+              </a:ext>
+            </a:extLst>
+          </p:cNvPr>
+          <p:cNvSpPr>
+            <a:spLocks noGrp="1"/>
+          </p:cNvSpPr>
+          <p:nvPr>
+            <p:ph idx="1"/>
+          </p:nvPr>
+        </p:nvSpPr>
+        <p:spPr>
+          <a:xfrm>
+            <a:off x="395288" y="1628775"/>
+            <a:ext cx="8229600" cy="3600450"/>
+          </a:xfrm>
+          <a:solidFill>
+            <a:schemeClr val="bg2">
+              <a:lumMod val="20000"/>
+              <a:lumOff val="80000"/>
+            </a:schemeClr>
+          </a:solidFill>
+          <a:ln>
+            <a:solidFill>
+              <a:schemeClr val="tx1"/>
+            </a:solidFill>
+          </a:ln>
+        </p:spPr>
+        <p:txBody>
+          <a:bodyPr/>
+          <a:lstStyle/>
+          <a:p>
+            <a:pPr>
+              <a:defRPr/>
+            </a:pPr>
+            <a:endParaRPr lang="ko-KR" altLang="en-US" sz="2400" dirty="0">
+              <a:latin typeface="Courier New" pitchFamily="49" charset="0"/>
+              <a:cs typeface="Courier New" pitchFamily="49" charset="0"/>
+            </a:endParaRPr>
+          </a:p>
+          <a:p>
+            <a:pPr>
+              <a:buFont typeface="Wingdings" pitchFamily="2" charset="2"/>
+              <a:buNone/>
+              <a:defRPr/>
+            </a:pPr>
+            <a:r>
+              <a:rPr lang="en-US" altLang="ko-KR" sz="2400" b="1" dirty="0">
+                <a:latin typeface="Courier New" pitchFamily="49" charset="0"/>
+                <a:cs typeface="Courier New" pitchFamily="49" charset="0"/>
+              </a:rPr>
+              <a:t>class Account {</a:t>
+            </a:r>
+          </a:p>
+          <a:p>
+            <a:pPr>
+              <a:buFont typeface="Wingdings" pitchFamily="2" charset="2"/>
+              <a:buNone/>
+              <a:defRPr/>
+            </a:pPr>
+            <a:r>
+              <a:rPr lang="en-US" altLang="ko-KR" sz="2400" b="1" dirty="0">
+                <a:latin typeface="Courier New" pitchFamily="49" charset="0"/>
+                <a:cs typeface="Courier New" pitchFamily="49" charset="0"/>
+              </a:rPr>
+              <a:t>  </a:t>
+            </a:r>
+            <a:r>
+              <a:rPr lang="en-US" altLang="ko-KR" sz="2400" b="1" dirty="0" err="1">
+                <a:latin typeface="Courier New" pitchFamily="49" charset="0"/>
+                <a:cs typeface="Courier New" pitchFamily="49" charset="0"/>
+              </a:rPr>
+              <a:t>int</a:t>
+            </a:r>
+            <a:r>
+              <a:rPr lang="en-US" altLang="ko-KR" sz="2400" b="1" dirty="0">
+                <a:latin typeface="Courier New" pitchFamily="49" charset="0"/>
+                <a:cs typeface="Courier New" pitchFamily="49" charset="0"/>
+              </a:rPr>
+              <a:t> balance;</a:t>
+            </a:r>
+          </a:p>
+          <a:p>
+            <a:pPr>
+              <a:buFont typeface="Wingdings" pitchFamily="2" charset="2"/>
+              <a:buNone/>
+              <a:defRPr/>
+            </a:pPr>
+            <a:r>
+              <a:rPr lang="en-US" altLang="ko-KR" sz="2400" b="1" dirty="0">
+                <a:latin typeface="Courier New" pitchFamily="49" charset="0"/>
+                <a:cs typeface="Courier New" pitchFamily="49" charset="0"/>
+              </a:rPr>
+              <a:t>  public void deposit(</a:t>
+            </a:r>
+            <a:r>
+              <a:rPr lang="en-US" altLang="ko-KR" sz="2400" b="1" dirty="0" err="1">
+                <a:latin typeface="Courier New" pitchFamily="49" charset="0"/>
+                <a:cs typeface="Courier New" pitchFamily="49" charset="0"/>
+              </a:rPr>
+              <a:t>int</a:t>
+            </a:r>
+            <a:r>
+              <a:rPr lang="en-US" altLang="ko-KR" sz="2400" b="1" dirty="0">
+                <a:latin typeface="Courier New" pitchFamily="49" charset="0"/>
+                <a:cs typeface="Courier New" pitchFamily="49" charset="0"/>
+              </a:rPr>
+              <a:t> </a:t>
+            </a:r>
+            <a:r>
+              <a:rPr lang="en-US" altLang="ko-KR" sz="2400" b="1" dirty="0" err="1">
+                <a:latin typeface="Courier New" pitchFamily="49" charset="0"/>
+                <a:cs typeface="Courier New" pitchFamily="49" charset="0"/>
+              </a:rPr>
+              <a:t>val</a:t>
+            </a:r>
+            <a:r>
+              <a:rPr lang="en-US" altLang="ko-KR" sz="2400" b="1" dirty="0">
+                <a:latin typeface="Courier New" pitchFamily="49" charset="0"/>
+                <a:cs typeface="Courier New" pitchFamily="49" charset="0"/>
+              </a:rPr>
+              <a:t>)</a:t>
+            </a:r>
+          </a:p>
+          <a:p>
+            <a:pPr>
+              <a:buFont typeface="Wingdings" pitchFamily="2" charset="2"/>
+              <a:buNone/>
+              <a:defRPr/>
+            </a:pPr>
+            <a:r>
+              <a:rPr lang="en-US" altLang="ko-KR" sz="2400" b="1" dirty="0">
+                <a:latin typeface="Courier New" pitchFamily="49" charset="0"/>
+                <a:cs typeface="Courier New" pitchFamily="49" charset="0"/>
+              </a:rPr>
+              <a:t>  {</a:t>
+            </a:r>
+          </a:p>
+          <a:p>
+            <a:pPr>
+              <a:buFont typeface="Wingdings" pitchFamily="2" charset="2"/>
+              <a:buNone/>
+              <a:defRPr/>
+            </a:pPr>
+            <a:r>
+              <a:rPr lang="en-US" altLang="ko-KR" sz="2400" b="1" dirty="0">
+                <a:latin typeface="Courier New" pitchFamily="49" charset="0"/>
+                <a:cs typeface="Courier New" pitchFamily="49" charset="0"/>
+              </a:rPr>
+              <a:t>    balance = balance + </a:t>
+            </a:r>
+            <a:r>
+              <a:rPr lang="en-US" altLang="ko-KR" sz="2400" b="1" dirty="0" err="1">
+                <a:latin typeface="Courier New" pitchFamily="49" charset="0"/>
+                <a:cs typeface="Courier New" pitchFamily="49" charset="0"/>
+              </a:rPr>
+              <a:t>val</a:t>
+            </a:r>
+            <a:r>
+              <a:rPr lang="en-US" altLang="ko-KR" sz="2400" b="1" dirty="0">
+                <a:latin typeface="Courier New" pitchFamily="49" charset="0"/>
+                <a:cs typeface="Courier New" pitchFamily="49" charset="0"/>
+              </a:rPr>
+              <a:t>;</a:t>
+            </a:r>
+          </a:p>
+          <a:p>
+            <a:pPr>
+              <a:buFont typeface="Wingdings" pitchFamily="2" charset="2"/>
+              <a:buNone/>
+              <a:defRPr/>
+            </a:pPr>
+            <a:r>
+              <a:rPr lang="en-US" altLang="ko-KR" sz="2400" b="1" dirty="0">
+                <a:latin typeface="Courier New" pitchFamily="49" charset="0"/>
+                <a:cs typeface="Courier New" pitchFamily="49" charset="0"/>
+              </a:rPr>
+              <a:t>  }</a:t>
+            </a:r>
+          </a:p>
+          <a:p>
+            <a:pPr>
+              <a:buFont typeface="Wingdings" pitchFamily="2" charset="2"/>
+              <a:buNone/>
+              <a:defRPr/>
+            </a:pPr>
+            <a:r>
+              <a:rPr lang="en-US" altLang="ko-KR" sz="2400" b="1" dirty="0">
+                <a:latin typeface="Courier New" pitchFamily="49" charset="0"/>
+                <a:cs typeface="Courier New" pitchFamily="49" charset="0"/>
+              </a:rPr>
+              <a:t>}</a:t>
+            </a:r>
+            <a:endParaRPr lang="ko-KR" altLang="en-US" sz="2400" dirty="0">
+              <a:latin typeface="Courier New" pitchFamily="49" charset="0"/>
+              <a:cs typeface="Courier New" pitchFamily="49" charset="0"/>
+            </a:endParaRPr>
+          </a:p>
+        </p:txBody>
+      </p:sp>
+    </p:spTree>
+  </p:cSld>
+  <p:clrMapOvr>
+    <a:masterClrMapping/>
+  </p:clrMapOvr>
+</p:sld>
+</file>
+
+<file path=ppt/slides/slide41.xml><?xml version="1.0" encoding="utf-8"?>
 <p:sld xmlns:a="http://schemas.openxmlformats.org/drawingml/2006/main" xmlns:r="http://schemas.openxmlformats.org/officeDocument/2006/relationships" xmlns:p="http://schemas.openxmlformats.org/presentationml/2006/main">
   <p:cSld>
     <p:spTree>
@@ -17265,7 +17515,7 @@
 </p:sld>
 </file>
 
-<file path=ppt/slides/slide41.xml><?xml version="1.0" encoding="utf-8"?>
+<file path=ppt/slides/slide42.xml><?xml version="1.0" encoding="utf-8"?>
 <p:sld xmlns:a="http://schemas.openxmlformats.org/drawingml/2006/main" xmlns:r="http://schemas.openxmlformats.org/officeDocument/2006/relationships" xmlns:p="http://schemas.openxmlformats.org/presentationml/2006/main">
   <p:cSld>
     <p:spTree>
@@ -17390,7 +17640,7 @@
 </p:sld>
 </file>
 
-<file path=ppt/slides/slide42.xml><?xml version="1.0" encoding="utf-8"?>
+<file path=ppt/slides/slide43.xml><?xml version="1.0" encoding="utf-8"?>
 <p:sld xmlns:a="http://schemas.openxmlformats.org/drawingml/2006/main" xmlns:r="http://schemas.openxmlformats.org/officeDocument/2006/relationships" xmlns:p="http://schemas.openxmlformats.org/presentationml/2006/main">
   <p:cSld>
     <p:spTree>
@@ -17529,7 +17779,7 @@
 </p:sld>
 </file>
 
-<file path=ppt/slides/slide43.xml><?xml version="1.0" encoding="utf-8"?>
+<file path=ppt/slides/slide44.xml><?xml version="1.0" encoding="utf-8"?>
 <p:sld xmlns:a="http://schemas.openxmlformats.org/drawingml/2006/main" xmlns:r="http://schemas.openxmlformats.org/officeDocument/2006/relationships" xmlns:p="http://schemas.openxmlformats.org/presentationml/2006/main">
   <p:cSld>
     <p:spTree>
@@ -17997,7 +18247,7 @@
 </p:sld>
 </file>
 
-<file path=ppt/slides/slide44.xml><?xml version="1.0" encoding="utf-8"?>
+<file path=ppt/slides/slide45.xml><?xml version="1.0" encoding="utf-8"?>
 <p:sld xmlns:a="http://schemas.openxmlformats.org/drawingml/2006/main" xmlns:r="http://schemas.openxmlformats.org/officeDocument/2006/relationships" xmlns:p="http://schemas.openxmlformats.org/presentationml/2006/main">
   <p:cSld>
     <p:spTree>
@@ -19067,7 +19317,7 @@
 </p:sld>
 </file>
 
-<file path=ppt/slides/slide45.xml><?xml version="1.0" encoding="utf-8"?>
+<file path=ppt/slides/slide46.xml><?xml version="1.0" encoding="utf-8"?>
 <p:sld xmlns:a="http://schemas.openxmlformats.org/drawingml/2006/main" xmlns:r="http://schemas.openxmlformats.org/officeDocument/2006/relationships" xmlns:p="http://schemas.openxmlformats.org/presentationml/2006/main">
   <p:cSld>
     <p:spTree>
@@ -19747,7 +19997,7 @@
 </p:sld>
 </file>
 
-<file path=ppt/slides/slide46.xml><?xml version="1.0" encoding="utf-8"?>
+<file path=ppt/slides/slide47.xml><?xml version="1.0" encoding="utf-8"?>
 <p:sld xmlns:a="http://schemas.openxmlformats.org/drawingml/2006/main" xmlns:r="http://schemas.openxmlformats.org/officeDocument/2006/relationships" xmlns:p="http://schemas.openxmlformats.org/presentationml/2006/main">
   <p:cSld>
     <p:spTree>
@@ -20278,7 +20528,7 @@
 </p:sld>
 </file>
 
-<file path=ppt/slides/slide47.xml><?xml version="1.0" encoding="utf-8"?>
+<file path=ppt/slides/slide48.xml><?xml version="1.0" encoding="utf-8"?>
 <p:sld xmlns:a="http://schemas.openxmlformats.org/drawingml/2006/main" xmlns:r="http://schemas.openxmlformats.org/officeDocument/2006/relationships" xmlns:p="http://schemas.openxmlformats.org/presentationml/2006/main">
   <p:cSld>
     <p:spTree>
@@ -20487,7 +20737,7 @@
 </p:sld>
 </file>
 
-<file path=ppt/slides/slide48.xml><?xml version="1.0" encoding="utf-8"?>
+<file path=ppt/slides/slide49.xml><?xml version="1.0" encoding="utf-8"?>
 <p:sld xmlns:a="http://schemas.openxmlformats.org/drawingml/2006/main" xmlns:r="http://schemas.openxmlformats.org/officeDocument/2006/relationships" xmlns:p="http://schemas.openxmlformats.org/presentationml/2006/main">
   <p:cSld>
     <p:spTree>
@@ -20952,1053 +21202,6 @@
               <a:latin typeface="Courier New" pitchFamily="49" charset="0"/>
               <a:ea typeface="굴림" pitchFamily="50" charset="-127"/>
               <a:cs typeface="Courier New" pitchFamily="49" charset="0"/>
-            </a:endParaRPr>
-          </a:p>
-        </p:txBody>
-      </p:sp>
-    </p:spTree>
-  </p:cSld>
-  <p:clrMapOvr>
-    <a:masterClrMapping/>
-  </p:clrMapOvr>
-</p:sld>
-</file>
-
-<file path=ppt/slides/slide49.xml><?xml version="1.0" encoding="utf-8"?>
-<p:sld xmlns:a="http://schemas.openxmlformats.org/drawingml/2006/main" xmlns:r="http://schemas.openxmlformats.org/officeDocument/2006/relationships" xmlns:p="http://schemas.openxmlformats.org/presentationml/2006/main">
-  <p:cSld>
-    <p:spTree>
-      <p:nvGrpSpPr>
-        <p:cNvPr id="1" name=""/>
-        <p:cNvGrpSpPr/>
-        <p:nvPr/>
-      </p:nvGrpSpPr>
-      <p:grpSpPr>
-        <a:xfrm>
-          <a:off x="0" y="0"/>
-          <a:ext cx="0" cy="0"/>
-          <a:chOff x="0" y="0"/>
-          <a:chExt cx="0" cy="0"/>
-        </a:xfrm>
-      </p:grpSpPr>
-      <p:sp>
-        <p:nvSpPr>
-          <p:cNvPr id="48130" name="제목 1">
-            <a:extLst>
-              <a:ext uri="{FF2B5EF4-FFF2-40B4-BE49-F238E27FC236}">
-                <a16:creationId xmlns:a16="http://schemas.microsoft.com/office/drawing/2014/main" id="{4372F175-9974-454A-96C1-A4F69FA9A0E2}"/>
-              </a:ext>
-            </a:extLst>
-          </p:cNvPr>
-          <p:cNvSpPr>
-            <a:spLocks noGrp="1"/>
-          </p:cNvSpPr>
-          <p:nvPr>
-            <p:ph type="title"/>
-          </p:nvPr>
-        </p:nvSpPr>
-        <p:spPr/>
-        <p:txBody>
-          <a:bodyPr/>
-          <a:lstStyle/>
-          <a:p>
-            <a:endParaRPr lang="ko-KR" altLang="en-US"/>
-          </a:p>
-        </p:txBody>
-      </p:sp>
-      <p:sp>
-        <p:nvSpPr>
-          <p:cNvPr id="48131" name="내용 개체 틀 2">
-            <a:extLst>
-              <a:ext uri="{FF2B5EF4-FFF2-40B4-BE49-F238E27FC236}">
-                <a16:creationId xmlns:a16="http://schemas.microsoft.com/office/drawing/2014/main" id="{43252108-DD91-81CE-364B-4D8E7DB4F07E}"/>
-              </a:ext>
-            </a:extLst>
-          </p:cNvPr>
-          <p:cNvSpPr>
-            <a:spLocks noGrp="1"/>
-          </p:cNvSpPr>
-          <p:nvPr>
-            <p:ph idx="1"/>
-          </p:nvPr>
-        </p:nvSpPr>
-        <p:spPr/>
-        <p:txBody>
-          <a:bodyPr/>
-          <a:lstStyle/>
-          <a:p>
-            <a:endParaRPr lang="ko-KR" altLang="en-US"/>
-          </a:p>
-        </p:txBody>
-      </p:sp>
-      <p:sp>
-        <p:nvSpPr>
-          <p:cNvPr id="4" name="TextBox 3">
-            <a:extLst>
-              <a:ext uri="{FF2B5EF4-FFF2-40B4-BE49-F238E27FC236}">
-                <a16:creationId xmlns:a16="http://schemas.microsoft.com/office/drawing/2014/main" id="{FB40FC55-B9A9-D996-E2C2-FEE4EB711D66}"/>
-              </a:ext>
-            </a:extLst>
-          </p:cNvPr>
-          <p:cNvSpPr txBox="1"/>
-          <p:nvPr/>
-        </p:nvSpPr>
-        <p:spPr>
-          <a:xfrm>
-            <a:off x="827088" y="385763"/>
-            <a:ext cx="6132512" cy="6356350"/>
-          </a:xfrm>
-          <a:prstGeom prst="rect">
-            <a:avLst/>
-          </a:prstGeom>
-          <a:solidFill>
-            <a:schemeClr val="bg2">
-              <a:lumMod val="20000"/>
-              <a:lumOff val="80000"/>
-            </a:schemeClr>
-          </a:solidFill>
-          <a:ln>
-            <a:solidFill>
-              <a:schemeClr val="tx1"/>
-            </a:solidFill>
-          </a:ln>
-        </p:spPr>
-        <p:txBody>
-          <a:bodyPr wrap="none">
-            <a:spAutoFit/>
-          </a:bodyPr>
-          <a:lstStyle/>
-          <a:p>
-            <a:pPr>
-              <a:defRPr/>
-            </a:pPr>
-            <a:r>
-              <a:rPr lang="en-US" altLang="ko-KR" sz="1100" b="1" dirty="0">
-                <a:latin typeface="Courier New" pitchFamily="49" charset="0"/>
-                <a:ea typeface="굴림" pitchFamily="50" charset="-127"/>
-                <a:cs typeface="Courier New" pitchFamily="49" charset="0"/>
-              </a:rPr>
-              <a:t>class </a:t>
-            </a:r>
-            <a:r>
-              <a:rPr lang="en-US" altLang="ko-KR" sz="1100" b="1" dirty="0" err="1">
-                <a:latin typeface="Courier New" pitchFamily="49" charset="0"/>
-                <a:ea typeface="굴림" pitchFamily="50" charset="-127"/>
-                <a:cs typeface="Courier New" pitchFamily="49" charset="0"/>
-              </a:rPr>
-              <a:t>TransThread</a:t>
-            </a:r>
-            <a:r>
-              <a:rPr lang="en-US" altLang="ko-KR" sz="1100" b="1" dirty="0">
-                <a:latin typeface="Courier New" pitchFamily="49" charset="0"/>
-                <a:ea typeface="굴림" pitchFamily="50" charset="-127"/>
-                <a:cs typeface="Courier New" pitchFamily="49" charset="0"/>
-              </a:rPr>
-              <a:t> extends Thread</a:t>
-            </a:r>
-          </a:p>
-          <a:p>
-            <a:pPr>
-              <a:defRPr/>
-            </a:pPr>
-            <a:r>
-              <a:rPr lang="en-US" altLang="ko-KR" sz="1100" b="1" dirty="0">
-                <a:latin typeface="Courier New" pitchFamily="49" charset="0"/>
-                <a:ea typeface="굴림" pitchFamily="50" charset="-127"/>
-                <a:cs typeface="Courier New" pitchFamily="49" charset="0"/>
-              </a:rPr>
-              <a:t>{</a:t>
-            </a:r>
-          </a:p>
-          <a:p>
-            <a:pPr>
-              <a:defRPr/>
-            </a:pPr>
-            <a:r>
-              <a:rPr lang="en-US" altLang="ko-KR" sz="1100" b="1" dirty="0">
-                <a:latin typeface="Courier New" pitchFamily="49" charset="0"/>
-                <a:ea typeface="굴림" pitchFamily="50" charset="-127"/>
-                <a:cs typeface="Courier New" pitchFamily="49" charset="0"/>
-              </a:rPr>
-              <a:t>   private </a:t>
-            </a:r>
-            <a:r>
-              <a:rPr lang="en-US" altLang="ko-KR" sz="1100" b="1" dirty="0" err="1">
-                <a:latin typeface="Courier New" pitchFamily="49" charset="0"/>
-                <a:ea typeface="굴림" pitchFamily="50" charset="-127"/>
-                <a:cs typeface="Courier New" pitchFamily="49" charset="0"/>
-              </a:rPr>
-              <a:t>FinTrans</a:t>
-            </a:r>
-            <a:r>
-              <a:rPr lang="en-US" altLang="ko-KR" sz="1100" b="1" dirty="0">
-                <a:latin typeface="Courier New" pitchFamily="49" charset="0"/>
-                <a:ea typeface="굴림" pitchFamily="50" charset="-127"/>
-                <a:cs typeface="Courier New" pitchFamily="49" charset="0"/>
-              </a:rPr>
-              <a:t> ft;</a:t>
-            </a:r>
-          </a:p>
-          <a:p>
-            <a:pPr>
-              <a:defRPr/>
-            </a:pPr>
-            <a:r>
-              <a:rPr lang="en-US" altLang="ko-KR" sz="1100" b="1" dirty="0">
-                <a:latin typeface="Courier New" pitchFamily="49" charset="0"/>
-                <a:ea typeface="굴림" pitchFamily="50" charset="-127"/>
-                <a:cs typeface="Courier New" pitchFamily="49" charset="0"/>
-              </a:rPr>
-              <a:t>   </a:t>
-            </a:r>
-            <a:r>
-              <a:rPr lang="en-US" altLang="ko-KR" sz="1100" b="1" dirty="0" err="1">
-                <a:latin typeface="Courier New" pitchFamily="49" charset="0"/>
-                <a:ea typeface="굴림" pitchFamily="50" charset="-127"/>
-                <a:cs typeface="Courier New" pitchFamily="49" charset="0"/>
-              </a:rPr>
-              <a:t>TransThread</a:t>
-            </a:r>
-            <a:r>
-              <a:rPr lang="en-US" altLang="ko-KR" sz="1100" b="1" dirty="0">
-                <a:latin typeface="Courier New" pitchFamily="49" charset="0"/>
-                <a:ea typeface="굴림" pitchFamily="50" charset="-127"/>
-                <a:cs typeface="Courier New" pitchFamily="49" charset="0"/>
-              </a:rPr>
-              <a:t> (</a:t>
-            </a:r>
-            <a:r>
-              <a:rPr lang="en-US" altLang="ko-KR" sz="1100" b="1" dirty="0" err="1">
-                <a:latin typeface="Courier New" pitchFamily="49" charset="0"/>
-                <a:ea typeface="굴림" pitchFamily="50" charset="-127"/>
-                <a:cs typeface="Courier New" pitchFamily="49" charset="0"/>
-              </a:rPr>
-              <a:t>FinTrans</a:t>
-            </a:r>
-            <a:r>
-              <a:rPr lang="en-US" altLang="ko-KR" sz="1100" b="1" dirty="0">
-                <a:latin typeface="Courier New" pitchFamily="49" charset="0"/>
-                <a:ea typeface="굴림" pitchFamily="50" charset="-127"/>
-                <a:cs typeface="Courier New" pitchFamily="49" charset="0"/>
-              </a:rPr>
-              <a:t> ft, String name)</a:t>
-            </a:r>
-          </a:p>
-          <a:p>
-            <a:pPr>
-              <a:defRPr/>
-            </a:pPr>
-            <a:r>
-              <a:rPr lang="en-US" altLang="ko-KR" sz="1100" b="1" dirty="0">
-                <a:latin typeface="Courier New" pitchFamily="49" charset="0"/>
-                <a:ea typeface="굴림" pitchFamily="50" charset="-127"/>
-                <a:cs typeface="Courier New" pitchFamily="49" charset="0"/>
-              </a:rPr>
-              <a:t>   {</a:t>
-            </a:r>
-          </a:p>
-          <a:p>
-            <a:pPr>
-              <a:defRPr/>
-            </a:pPr>
-            <a:r>
-              <a:rPr lang="en-US" altLang="ko-KR" sz="1100" b="1" dirty="0">
-                <a:latin typeface="Courier New" pitchFamily="49" charset="0"/>
-                <a:ea typeface="굴림" pitchFamily="50" charset="-127"/>
-                <a:cs typeface="Courier New" pitchFamily="49" charset="0"/>
-              </a:rPr>
-              <a:t>      super (name); // Save thread's name</a:t>
-            </a:r>
-          </a:p>
-          <a:p>
-            <a:pPr>
-              <a:defRPr/>
-            </a:pPr>
-            <a:r>
-              <a:rPr lang="en-US" altLang="ko-KR" sz="1100" b="1" dirty="0">
-                <a:latin typeface="Courier New" pitchFamily="49" charset="0"/>
-                <a:ea typeface="굴림" pitchFamily="50" charset="-127"/>
-                <a:cs typeface="Courier New" pitchFamily="49" charset="0"/>
-              </a:rPr>
-              <a:t>      </a:t>
-            </a:r>
-            <a:r>
-              <a:rPr lang="en-US" altLang="ko-KR" sz="1100" b="1" dirty="0" err="1">
-                <a:latin typeface="Courier New" pitchFamily="49" charset="0"/>
-                <a:ea typeface="굴림" pitchFamily="50" charset="-127"/>
-                <a:cs typeface="Courier New" pitchFamily="49" charset="0"/>
-              </a:rPr>
-              <a:t>this.ft</a:t>
-            </a:r>
-            <a:r>
-              <a:rPr lang="en-US" altLang="ko-KR" sz="1100" b="1" dirty="0">
-                <a:latin typeface="Courier New" pitchFamily="49" charset="0"/>
-                <a:ea typeface="굴림" pitchFamily="50" charset="-127"/>
-                <a:cs typeface="Courier New" pitchFamily="49" charset="0"/>
-              </a:rPr>
-              <a:t> = ft; // Save reference to financial transaction object</a:t>
-            </a:r>
-          </a:p>
-          <a:p>
-            <a:pPr>
-              <a:defRPr/>
-            </a:pPr>
-            <a:r>
-              <a:rPr lang="en-US" altLang="ko-KR" sz="1100" b="1" dirty="0">
-                <a:latin typeface="Courier New" pitchFamily="49" charset="0"/>
-                <a:ea typeface="굴림" pitchFamily="50" charset="-127"/>
-                <a:cs typeface="Courier New" pitchFamily="49" charset="0"/>
-              </a:rPr>
-              <a:t>   }</a:t>
-            </a:r>
-          </a:p>
-          <a:p>
-            <a:pPr>
-              <a:defRPr/>
-            </a:pPr>
-            <a:r>
-              <a:rPr lang="en-US" altLang="ko-KR" sz="1100" b="1" dirty="0">
-                <a:latin typeface="Courier New" pitchFamily="49" charset="0"/>
-                <a:ea typeface="굴림" pitchFamily="50" charset="-127"/>
-                <a:cs typeface="Courier New" pitchFamily="49" charset="0"/>
-              </a:rPr>
-              <a:t>   public void run ()</a:t>
-            </a:r>
-          </a:p>
-          <a:p>
-            <a:pPr>
-              <a:defRPr/>
-            </a:pPr>
-            <a:r>
-              <a:rPr lang="en-US" altLang="ko-KR" sz="1100" b="1" dirty="0">
-                <a:latin typeface="Courier New" pitchFamily="49" charset="0"/>
-                <a:ea typeface="굴림" pitchFamily="50" charset="-127"/>
-                <a:cs typeface="Courier New" pitchFamily="49" charset="0"/>
-              </a:rPr>
-              <a:t>   {</a:t>
-            </a:r>
-          </a:p>
-          <a:p>
-            <a:pPr>
-              <a:defRPr/>
-            </a:pPr>
-            <a:r>
-              <a:rPr lang="en-US" altLang="ko-KR" sz="1100" b="1" dirty="0">
-                <a:latin typeface="Courier New" pitchFamily="49" charset="0"/>
-                <a:ea typeface="굴림" pitchFamily="50" charset="-127"/>
-                <a:cs typeface="Courier New" pitchFamily="49" charset="0"/>
-              </a:rPr>
-              <a:t>      for (</a:t>
-            </a:r>
-            <a:r>
-              <a:rPr lang="en-US" altLang="ko-KR" sz="1100" b="1" dirty="0" err="1">
-                <a:latin typeface="Courier New" pitchFamily="49" charset="0"/>
-                <a:ea typeface="굴림" pitchFamily="50" charset="-127"/>
-                <a:cs typeface="Courier New" pitchFamily="49" charset="0"/>
-              </a:rPr>
-              <a:t>int</a:t>
-            </a:r>
-            <a:r>
-              <a:rPr lang="en-US" altLang="ko-KR" sz="1100" b="1" dirty="0">
-                <a:latin typeface="Courier New" pitchFamily="49" charset="0"/>
-                <a:ea typeface="굴림" pitchFamily="50" charset="-127"/>
-                <a:cs typeface="Courier New" pitchFamily="49" charset="0"/>
-              </a:rPr>
-              <a:t> </a:t>
-            </a:r>
-            <a:r>
-              <a:rPr lang="en-US" altLang="ko-KR" sz="1100" b="1" dirty="0" err="1">
-                <a:latin typeface="Courier New" pitchFamily="49" charset="0"/>
-                <a:ea typeface="굴림" pitchFamily="50" charset="-127"/>
-                <a:cs typeface="Courier New" pitchFamily="49" charset="0"/>
-              </a:rPr>
-              <a:t>i</a:t>
-            </a:r>
-            <a:r>
-              <a:rPr lang="en-US" altLang="ko-KR" sz="1100" b="1" dirty="0">
-                <a:latin typeface="Courier New" pitchFamily="49" charset="0"/>
-                <a:ea typeface="굴림" pitchFamily="50" charset="-127"/>
-                <a:cs typeface="Courier New" pitchFamily="49" charset="0"/>
-              </a:rPr>
-              <a:t> = 0; </a:t>
-            </a:r>
-            <a:r>
-              <a:rPr lang="en-US" altLang="ko-KR" sz="1100" b="1" dirty="0" err="1">
-                <a:latin typeface="Courier New" pitchFamily="49" charset="0"/>
-                <a:ea typeface="굴림" pitchFamily="50" charset="-127"/>
-                <a:cs typeface="Courier New" pitchFamily="49" charset="0"/>
-              </a:rPr>
-              <a:t>i</a:t>
-            </a:r>
-            <a:r>
-              <a:rPr lang="en-US" altLang="ko-KR" sz="1100" b="1" dirty="0">
-                <a:latin typeface="Courier New" pitchFamily="49" charset="0"/>
-                <a:ea typeface="굴림" pitchFamily="50" charset="-127"/>
-                <a:cs typeface="Courier New" pitchFamily="49" charset="0"/>
-              </a:rPr>
-              <a:t> &lt; 100; </a:t>
-            </a:r>
-            <a:r>
-              <a:rPr lang="en-US" altLang="ko-KR" sz="1100" b="1" dirty="0" err="1">
-                <a:latin typeface="Courier New" pitchFamily="49" charset="0"/>
-                <a:ea typeface="굴림" pitchFamily="50" charset="-127"/>
-                <a:cs typeface="Courier New" pitchFamily="49" charset="0"/>
-              </a:rPr>
-              <a:t>i</a:t>
-            </a:r>
-            <a:r>
-              <a:rPr lang="en-US" altLang="ko-KR" sz="1100" b="1" dirty="0">
-                <a:latin typeface="Courier New" pitchFamily="49" charset="0"/>
-                <a:ea typeface="굴림" pitchFamily="50" charset="-127"/>
-                <a:cs typeface="Courier New" pitchFamily="49" charset="0"/>
-              </a:rPr>
-              <a:t>++){</a:t>
-            </a:r>
-          </a:p>
-          <a:p>
-            <a:pPr>
-              <a:defRPr/>
-            </a:pPr>
-            <a:r>
-              <a:rPr lang="en-US" altLang="ko-KR" sz="1100" b="1" dirty="0">
-                <a:latin typeface="Courier New" pitchFamily="49" charset="0"/>
-                <a:ea typeface="굴림" pitchFamily="50" charset="-127"/>
-                <a:cs typeface="Courier New" pitchFamily="49" charset="0"/>
-              </a:rPr>
-              <a:t>           if (</a:t>
-            </a:r>
-            <a:r>
-              <a:rPr lang="en-US" altLang="ko-KR" sz="1100" b="1" dirty="0" err="1">
-                <a:latin typeface="Courier New" pitchFamily="49" charset="0"/>
-                <a:ea typeface="굴림" pitchFamily="50" charset="-127"/>
-                <a:cs typeface="Courier New" pitchFamily="49" charset="0"/>
-              </a:rPr>
-              <a:t>getName</a:t>
-            </a:r>
-            <a:r>
-              <a:rPr lang="en-US" altLang="ko-KR" sz="1100" b="1" dirty="0">
-                <a:latin typeface="Courier New" pitchFamily="49" charset="0"/>
-                <a:ea typeface="굴림" pitchFamily="50" charset="-127"/>
-                <a:cs typeface="Courier New" pitchFamily="49" charset="0"/>
-              </a:rPr>
-              <a:t> ().equals ("Deposit Thread"))</a:t>
-            </a:r>
-          </a:p>
-          <a:p>
-            <a:pPr>
-              <a:defRPr/>
-            </a:pPr>
-            <a:r>
-              <a:rPr lang="en-US" altLang="ko-KR" sz="1100" b="1" dirty="0">
-                <a:latin typeface="Courier New" pitchFamily="49" charset="0"/>
-                <a:ea typeface="굴림" pitchFamily="50" charset="-127"/>
-                <a:cs typeface="Courier New" pitchFamily="49" charset="0"/>
-              </a:rPr>
-              <a:t>           {</a:t>
-            </a:r>
-          </a:p>
-          <a:p>
-            <a:pPr>
-              <a:defRPr/>
-            </a:pPr>
-            <a:r>
-              <a:rPr lang="en-US" altLang="ko-KR" sz="1100" b="1" dirty="0">
-                <a:latin typeface="Courier New" pitchFamily="49" charset="0"/>
-                <a:ea typeface="굴림" pitchFamily="50" charset="-127"/>
-                <a:cs typeface="Courier New" pitchFamily="49" charset="0"/>
-              </a:rPr>
-              <a:t>               synchronized (ft){</a:t>
-            </a:r>
-          </a:p>
-          <a:p>
-            <a:pPr>
-              <a:defRPr/>
-            </a:pPr>
-            <a:r>
-              <a:rPr lang="en-US" altLang="ko-KR" sz="1100" b="1" dirty="0">
-                <a:latin typeface="Courier New" pitchFamily="49" charset="0"/>
-                <a:ea typeface="굴림" pitchFamily="50" charset="-127"/>
-                <a:cs typeface="Courier New" pitchFamily="49" charset="0"/>
-              </a:rPr>
-              <a:t>                  </a:t>
-            </a:r>
-            <a:r>
-              <a:rPr lang="en-US" altLang="ko-KR" sz="1100" b="1" dirty="0" err="1">
-                <a:latin typeface="Courier New" pitchFamily="49" charset="0"/>
-                <a:ea typeface="굴림" pitchFamily="50" charset="-127"/>
-                <a:cs typeface="Courier New" pitchFamily="49" charset="0"/>
-              </a:rPr>
-              <a:t>ft.transName</a:t>
-            </a:r>
-            <a:r>
-              <a:rPr lang="en-US" altLang="ko-KR" sz="1100" b="1" dirty="0">
-                <a:latin typeface="Courier New" pitchFamily="49" charset="0"/>
-                <a:ea typeface="굴림" pitchFamily="50" charset="-127"/>
-                <a:cs typeface="Courier New" pitchFamily="49" charset="0"/>
-              </a:rPr>
-              <a:t> = "Deposit";</a:t>
-            </a:r>
-          </a:p>
-          <a:p>
-            <a:pPr>
-              <a:defRPr/>
-            </a:pPr>
-            <a:r>
-              <a:rPr lang="en-US" altLang="ko-KR" sz="1100" b="1" dirty="0">
-                <a:latin typeface="Courier New" pitchFamily="49" charset="0"/>
-                <a:ea typeface="굴림" pitchFamily="50" charset="-127"/>
-                <a:cs typeface="Courier New" pitchFamily="49" charset="0"/>
-              </a:rPr>
-              <a:t>                  try{</a:t>
-            </a:r>
-          </a:p>
-          <a:p>
-            <a:pPr>
-              <a:defRPr/>
-            </a:pPr>
-            <a:r>
-              <a:rPr lang="en-US" altLang="ko-KR" sz="1100" b="1" dirty="0">
-                <a:latin typeface="Courier New" pitchFamily="49" charset="0"/>
-                <a:ea typeface="굴림" pitchFamily="50" charset="-127"/>
-                <a:cs typeface="Courier New" pitchFamily="49" charset="0"/>
-              </a:rPr>
-              <a:t>                     </a:t>
-            </a:r>
-            <a:r>
-              <a:rPr lang="en-US" altLang="ko-KR" sz="1100" b="1" dirty="0" err="1">
-                <a:latin typeface="Courier New" pitchFamily="49" charset="0"/>
-                <a:ea typeface="굴림" pitchFamily="50" charset="-127"/>
-                <a:cs typeface="Courier New" pitchFamily="49" charset="0"/>
-              </a:rPr>
-              <a:t>Thread.sleep</a:t>
-            </a:r>
-            <a:r>
-              <a:rPr lang="en-US" altLang="ko-KR" sz="1100" b="1" dirty="0">
-                <a:latin typeface="Courier New" pitchFamily="49" charset="0"/>
-                <a:ea typeface="굴림" pitchFamily="50" charset="-127"/>
-                <a:cs typeface="Courier New" pitchFamily="49" charset="0"/>
-              </a:rPr>
-              <a:t> ((</a:t>
-            </a:r>
-            <a:r>
-              <a:rPr lang="en-US" altLang="ko-KR" sz="1100" b="1" dirty="0" err="1">
-                <a:latin typeface="Courier New" pitchFamily="49" charset="0"/>
-                <a:ea typeface="굴림" pitchFamily="50" charset="-127"/>
-                <a:cs typeface="Courier New" pitchFamily="49" charset="0"/>
-              </a:rPr>
-              <a:t>int</a:t>
-            </a:r>
-            <a:r>
-              <a:rPr lang="en-US" altLang="ko-KR" sz="1100" b="1" dirty="0">
-                <a:latin typeface="Courier New" pitchFamily="49" charset="0"/>
-                <a:ea typeface="굴림" pitchFamily="50" charset="-127"/>
-                <a:cs typeface="Courier New" pitchFamily="49" charset="0"/>
-              </a:rPr>
-              <a:t>) (</a:t>
-            </a:r>
-            <a:r>
-              <a:rPr lang="en-US" altLang="ko-KR" sz="1100" b="1" dirty="0" err="1">
-                <a:latin typeface="Courier New" pitchFamily="49" charset="0"/>
-                <a:ea typeface="굴림" pitchFamily="50" charset="-127"/>
-                <a:cs typeface="Courier New" pitchFamily="49" charset="0"/>
-              </a:rPr>
-              <a:t>Math.random</a:t>
-            </a:r>
-            <a:r>
-              <a:rPr lang="en-US" altLang="ko-KR" sz="1100" b="1" dirty="0">
-                <a:latin typeface="Courier New" pitchFamily="49" charset="0"/>
-                <a:ea typeface="굴림" pitchFamily="50" charset="-127"/>
-                <a:cs typeface="Courier New" pitchFamily="49" charset="0"/>
-              </a:rPr>
-              <a:t> () * 1000));</a:t>
-            </a:r>
-          </a:p>
-          <a:p>
-            <a:pPr>
-              <a:defRPr/>
-            </a:pPr>
-            <a:r>
-              <a:rPr lang="en-US" altLang="ko-KR" sz="1100" b="1" dirty="0">
-                <a:latin typeface="Courier New" pitchFamily="49" charset="0"/>
-                <a:ea typeface="굴림" pitchFamily="50" charset="-127"/>
-                <a:cs typeface="Courier New" pitchFamily="49" charset="0"/>
-              </a:rPr>
-              <a:t>                  }</a:t>
-            </a:r>
-          </a:p>
-          <a:p>
-            <a:pPr>
-              <a:defRPr/>
-            </a:pPr>
-            <a:r>
-              <a:rPr lang="en-US" altLang="ko-KR" sz="1100" b="1" dirty="0">
-                <a:latin typeface="Courier New" pitchFamily="49" charset="0"/>
-                <a:ea typeface="굴림" pitchFamily="50" charset="-127"/>
-                <a:cs typeface="Courier New" pitchFamily="49" charset="0"/>
-              </a:rPr>
-              <a:t>                  catch (</a:t>
-            </a:r>
-            <a:r>
-              <a:rPr lang="en-US" altLang="ko-KR" sz="1100" b="1" dirty="0" err="1">
-                <a:latin typeface="Courier New" pitchFamily="49" charset="0"/>
-                <a:ea typeface="굴림" pitchFamily="50" charset="-127"/>
-                <a:cs typeface="Courier New" pitchFamily="49" charset="0"/>
-              </a:rPr>
-              <a:t>InterruptedException</a:t>
-            </a:r>
-            <a:r>
-              <a:rPr lang="en-US" altLang="ko-KR" sz="1100" b="1" dirty="0">
-                <a:latin typeface="Courier New" pitchFamily="49" charset="0"/>
-                <a:ea typeface="굴림" pitchFamily="50" charset="-127"/>
-                <a:cs typeface="Courier New" pitchFamily="49" charset="0"/>
-              </a:rPr>
-              <a:t> e) {}</a:t>
-            </a:r>
-          </a:p>
-          <a:p>
-            <a:pPr>
-              <a:defRPr/>
-            </a:pPr>
-            <a:r>
-              <a:rPr lang="en-US" altLang="ko-KR" sz="1100" b="1" dirty="0">
-                <a:latin typeface="Courier New" pitchFamily="49" charset="0"/>
-                <a:ea typeface="굴림" pitchFamily="50" charset="-127"/>
-                <a:cs typeface="Courier New" pitchFamily="49" charset="0"/>
-              </a:rPr>
-              <a:t>                  </a:t>
-            </a:r>
-            <a:r>
-              <a:rPr lang="en-US" altLang="ko-KR" sz="1100" b="1" dirty="0" err="1">
-                <a:latin typeface="Courier New" pitchFamily="49" charset="0"/>
-                <a:ea typeface="굴림" pitchFamily="50" charset="-127"/>
-                <a:cs typeface="Courier New" pitchFamily="49" charset="0"/>
-              </a:rPr>
-              <a:t>ft.amount</a:t>
-            </a:r>
-            <a:r>
-              <a:rPr lang="en-US" altLang="ko-KR" sz="1100" b="1" dirty="0">
-                <a:latin typeface="Courier New" pitchFamily="49" charset="0"/>
-                <a:ea typeface="굴림" pitchFamily="50" charset="-127"/>
-                <a:cs typeface="Courier New" pitchFamily="49" charset="0"/>
-              </a:rPr>
-              <a:t> = 2000.0;</a:t>
-            </a:r>
-          </a:p>
-          <a:p>
-            <a:pPr>
-              <a:defRPr/>
-            </a:pPr>
-            <a:r>
-              <a:rPr lang="en-US" altLang="ko-KR" sz="1100" b="1" dirty="0">
-                <a:latin typeface="Courier New" pitchFamily="49" charset="0"/>
-                <a:ea typeface="굴림" pitchFamily="50" charset="-127"/>
-                <a:cs typeface="Courier New" pitchFamily="49" charset="0"/>
-              </a:rPr>
-              <a:t>                  </a:t>
-            </a:r>
-            <a:r>
-              <a:rPr lang="en-US" altLang="ko-KR" sz="1100" b="1" dirty="0" err="1">
-                <a:latin typeface="Courier New" pitchFamily="49" charset="0"/>
-                <a:ea typeface="굴림" pitchFamily="50" charset="-127"/>
-                <a:cs typeface="Courier New" pitchFamily="49" charset="0"/>
-              </a:rPr>
-              <a:t>System.out.println</a:t>
-            </a:r>
-            <a:r>
-              <a:rPr lang="en-US" altLang="ko-KR" sz="1100" b="1" dirty="0">
-                <a:latin typeface="Courier New" pitchFamily="49" charset="0"/>
-                <a:ea typeface="굴림" pitchFamily="50" charset="-127"/>
-                <a:cs typeface="Courier New" pitchFamily="49" charset="0"/>
-              </a:rPr>
-              <a:t> (</a:t>
-            </a:r>
-            <a:r>
-              <a:rPr lang="en-US" altLang="ko-KR" sz="1100" b="1" dirty="0" err="1">
-                <a:latin typeface="Courier New" pitchFamily="49" charset="0"/>
-                <a:ea typeface="굴림" pitchFamily="50" charset="-127"/>
-                <a:cs typeface="Courier New" pitchFamily="49" charset="0"/>
-              </a:rPr>
-              <a:t>ft.transName</a:t>
-            </a:r>
-            <a:r>
-              <a:rPr lang="en-US" altLang="ko-KR" sz="1100" b="1" dirty="0">
-                <a:latin typeface="Courier New" pitchFamily="49" charset="0"/>
-                <a:ea typeface="굴림" pitchFamily="50" charset="-127"/>
-                <a:cs typeface="Courier New" pitchFamily="49" charset="0"/>
-              </a:rPr>
-              <a:t> + " " + </a:t>
-            </a:r>
-            <a:r>
-              <a:rPr lang="en-US" altLang="ko-KR" sz="1100" b="1" dirty="0" err="1">
-                <a:latin typeface="Courier New" pitchFamily="49" charset="0"/>
-                <a:ea typeface="굴림" pitchFamily="50" charset="-127"/>
-                <a:cs typeface="Courier New" pitchFamily="49" charset="0"/>
-              </a:rPr>
-              <a:t>ft.amount</a:t>
-            </a:r>
-            <a:r>
-              <a:rPr lang="en-US" altLang="ko-KR" sz="1100" b="1" dirty="0">
-                <a:latin typeface="Courier New" pitchFamily="49" charset="0"/>
-                <a:ea typeface="굴림" pitchFamily="50" charset="-127"/>
-                <a:cs typeface="Courier New" pitchFamily="49" charset="0"/>
-              </a:rPr>
-              <a:t>);</a:t>
-            </a:r>
-          </a:p>
-          <a:p>
-            <a:pPr>
-              <a:defRPr/>
-            </a:pPr>
-            <a:r>
-              <a:rPr lang="en-US" altLang="ko-KR" sz="1100" b="1" dirty="0">
-                <a:latin typeface="Courier New" pitchFamily="49" charset="0"/>
-                <a:ea typeface="굴림" pitchFamily="50" charset="-127"/>
-                <a:cs typeface="Courier New" pitchFamily="49" charset="0"/>
-              </a:rPr>
-              <a:t>               }</a:t>
-            </a:r>
-          </a:p>
-          <a:p>
-            <a:pPr>
-              <a:defRPr/>
-            </a:pPr>
-            <a:r>
-              <a:rPr lang="en-US" altLang="ko-KR" sz="1100" b="1" dirty="0">
-                <a:latin typeface="Courier New" pitchFamily="49" charset="0"/>
-                <a:ea typeface="굴림" pitchFamily="50" charset="-127"/>
-                <a:cs typeface="Courier New" pitchFamily="49" charset="0"/>
-              </a:rPr>
-              <a:t>           }</a:t>
-            </a:r>
-          </a:p>
-          <a:p>
-            <a:pPr>
-              <a:defRPr/>
-            </a:pPr>
-            <a:r>
-              <a:rPr lang="en-US" altLang="ko-KR" sz="1100" b="1" dirty="0">
-                <a:latin typeface="Courier New" pitchFamily="49" charset="0"/>
-                <a:ea typeface="굴림" pitchFamily="50" charset="-127"/>
-                <a:cs typeface="Courier New" pitchFamily="49" charset="0"/>
-              </a:rPr>
-              <a:t>           else {</a:t>
-            </a:r>
-          </a:p>
-          <a:p>
-            <a:pPr>
-              <a:defRPr/>
-            </a:pPr>
-            <a:r>
-              <a:rPr lang="en-US" altLang="ko-KR" sz="1100" b="1" dirty="0">
-                <a:latin typeface="Courier New" pitchFamily="49" charset="0"/>
-                <a:ea typeface="굴림" pitchFamily="50" charset="-127"/>
-                <a:cs typeface="Courier New" pitchFamily="49" charset="0"/>
-              </a:rPr>
-              <a:t>               synchronized (ft){</a:t>
-            </a:r>
-          </a:p>
-          <a:p>
-            <a:pPr>
-              <a:defRPr/>
-            </a:pPr>
-            <a:r>
-              <a:rPr lang="en-US" altLang="ko-KR" sz="1100" b="1" dirty="0">
-                <a:latin typeface="Courier New" pitchFamily="49" charset="0"/>
-                <a:ea typeface="굴림" pitchFamily="50" charset="-127"/>
-                <a:cs typeface="Courier New" pitchFamily="49" charset="0"/>
-              </a:rPr>
-              <a:t>                  </a:t>
-            </a:r>
-            <a:r>
-              <a:rPr lang="en-US" altLang="ko-KR" sz="1100" b="1" dirty="0" err="1">
-                <a:latin typeface="Courier New" pitchFamily="49" charset="0"/>
-                <a:ea typeface="굴림" pitchFamily="50" charset="-127"/>
-                <a:cs typeface="Courier New" pitchFamily="49" charset="0"/>
-              </a:rPr>
-              <a:t>ft.transName</a:t>
-            </a:r>
-            <a:r>
-              <a:rPr lang="en-US" altLang="ko-KR" sz="1100" b="1" dirty="0">
-                <a:latin typeface="Courier New" pitchFamily="49" charset="0"/>
-                <a:ea typeface="굴림" pitchFamily="50" charset="-127"/>
-                <a:cs typeface="Courier New" pitchFamily="49" charset="0"/>
-              </a:rPr>
-              <a:t> = "Withdrawal";</a:t>
-            </a:r>
-          </a:p>
-          <a:p>
-            <a:pPr>
-              <a:defRPr/>
-            </a:pPr>
-            <a:r>
-              <a:rPr lang="en-US" altLang="ko-KR" sz="1100" b="1" dirty="0">
-                <a:latin typeface="Courier New" pitchFamily="49" charset="0"/>
-                <a:ea typeface="굴림" pitchFamily="50" charset="-127"/>
-                <a:cs typeface="Courier New" pitchFamily="49" charset="0"/>
-              </a:rPr>
-              <a:t>                  try {</a:t>
-            </a:r>
-          </a:p>
-          <a:p>
-            <a:pPr>
-              <a:defRPr/>
-            </a:pPr>
-            <a:r>
-              <a:rPr lang="en-US" altLang="ko-KR" sz="1100" b="1" dirty="0">
-                <a:latin typeface="Courier New" pitchFamily="49" charset="0"/>
-                <a:ea typeface="굴림" pitchFamily="50" charset="-127"/>
-                <a:cs typeface="Courier New" pitchFamily="49" charset="0"/>
-              </a:rPr>
-              <a:t>                     </a:t>
-            </a:r>
-            <a:r>
-              <a:rPr lang="en-US" altLang="ko-KR" sz="1100" b="1" dirty="0" err="1">
-                <a:latin typeface="Courier New" pitchFamily="49" charset="0"/>
-                <a:ea typeface="굴림" pitchFamily="50" charset="-127"/>
-                <a:cs typeface="Courier New" pitchFamily="49" charset="0"/>
-              </a:rPr>
-              <a:t>Thread.sleep</a:t>
-            </a:r>
-            <a:r>
-              <a:rPr lang="en-US" altLang="ko-KR" sz="1100" b="1" dirty="0">
-                <a:latin typeface="Courier New" pitchFamily="49" charset="0"/>
-                <a:ea typeface="굴림" pitchFamily="50" charset="-127"/>
-                <a:cs typeface="Courier New" pitchFamily="49" charset="0"/>
-              </a:rPr>
-              <a:t> ((</a:t>
-            </a:r>
-            <a:r>
-              <a:rPr lang="en-US" altLang="ko-KR" sz="1100" b="1" dirty="0" err="1">
-                <a:latin typeface="Courier New" pitchFamily="49" charset="0"/>
-                <a:ea typeface="굴림" pitchFamily="50" charset="-127"/>
-                <a:cs typeface="Courier New" pitchFamily="49" charset="0"/>
-              </a:rPr>
-              <a:t>int</a:t>
-            </a:r>
-            <a:r>
-              <a:rPr lang="en-US" altLang="ko-KR" sz="1100" b="1" dirty="0">
-                <a:latin typeface="Courier New" pitchFamily="49" charset="0"/>
-                <a:ea typeface="굴림" pitchFamily="50" charset="-127"/>
-                <a:cs typeface="Courier New" pitchFamily="49" charset="0"/>
-              </a:rPr>
-              <a:t>) (</a:t>
-            </a:r>
-            <a:r>
-              <a:rPr lang="en-US" altLang="ko-KR" sz="1100" b="1" dirty="0" err="1">
-                <a:latin typeface="Courier New" pitchFamily="49" charset="0"/>
-                <a:ea typeface="굴림" pitchFamily="50" charset="-127"/>
-                <a:cs typeface="Courier New" pitchFamily="49" charset="0"/>
-              </a:rPr>
-              <a:t>Math.random</a:t>
-            </a:r>
-            <a:r>
-              <a:rPr lang="en-US" altLang="ko-KR" sz="1100" b="1" dirty="0">
-                <a:latin typeface="Courier New" pitchFamily="49" charset="0"/>
-                <a:ea typeface="굴림" pitchFamily="50" charset="-127"/>
-                <a:cs typeface="Courier New" pitchFamily="49" charset="0"/>
-              </a:rPr>
-              <a:t> () * 1000));</a:t>
-            </a:r>
-          </a:p>
-          <a:p>
-            <a:pPr>
-              <a:defRPr/>
-            </a:pPr>
-            <a:r>
-              <a:rPr lang="en-US" altLang="ko-KR" sz="1100" b="1" dirty="0">
-                <a:latin typeface="Courier New" pitchFamily="49" charset="0"/>
-                <a:ea typeface="굴림" pitchFamily="50" charset="-127"/>
-                <a:cs typeface="Courier New" pitchFamily="49" charset="0"/>
-              </a:rPr>
-              <a:t>                  }</a:t>
-            </a:r>
-          </a:p>
-          <a:p>
-            <a:pPr>
-              <a:defRPr/>
-            </a:pPr>
-            <a:r>
-              <a:rPr lang="en-US" altLang="ko-KR" sz="1100" b="1" dirty="0">
-                <a:latin typeface="Courier New" pitchFamily="49" charset="0"/>
-                <a:ea typeface="굴림" pitchFamily="50" charset="-127"/>
-                <a:cs typeface="Courier New" pitchFamily="49" charset="0"/>
-              </a:rPr>
-              <a:t>                  catch (</a:t>
-            </a:r>
-            <a:r>
-              <a:rPr lang="en-US" altLang="ko-KR" sz="1100" b="1" dirty="0" err="1">
-                <a:latin typeface="Courier New" pitchFamily="49" charset="0"/>
-                <a:ea typeface="굴림" pitchFamily="50" charset="-127"/>
-                <a:cs typeface="Courier New" pitchFamily="49" charset="0"/>
-              </a:rPr>
-              <a:t>InterruptedException</a:t>
-            </a:r>
-            <a:r>
-              <a:rPr lang="en-US" altLang="ko-KR" sz="1100" b="1" dirty="0">
-                <a:latin typeface="Courier New" pitchFamily="49" charset="0"/>
-                <a:ea typeface="굴림" pitchFamily="50" charset="-127"/>
-                <a:cs typeface="Courier New" pitchFamily="49" charset="0"/>
-              </a:rPr>
-              <a:t> e) {}</a:t>
-            </a:r>
-          </a:p>
-          <a:p>
-            <a:pPr>
-              <a:defRPr/>
-            </a:pPr>
-            <a:r>
-              <a:rPr lang="en-US" altLang="ko-KR" sz="1100" b="1" dirty="0">
-                <a:latin typeface="Courier New" pitchFamily="49" charset="0"/>
-                <a:ea typeface="굴림" pitchFamily="50" charset="-127"/>
-                <a:cs typeface="Courier New" pitchFamily="49" charset="0"/>
-              </a:rPr>
-              <a:t>                  </a:t>
-            </a:r>
-            <a:r>
-              <a:rPr lang="en-US" altLang="ko-KR" sz="1100" b="1" dirty="0" err="1">
-                <a:latin typeface="Courier New" pitchFamily="49" charset="0"/>
-                <a:ea typeface="굴림" pitchFamily="50" charset="-127"/>
-                <a:cs typeface="Courier New" pitchFamily="49" charset="0"/>
-              </a:rPr>
-              <a:t>ft.amount</a:t>
-            </a:r>
-            <a:r>
-              <a:rPr lang="en-US" altLang="ko-KR" sz="1100" b="1" dirty="0">
-                <a:latin typeface="Courier New" pitchFamily="49" charset="0"/>
-                <a:ea typeface="굴림" pitchFamily="50" charset="-127"/>
-                <a:cs typeface="Courier New" pitchFamily="49" charset="0"/>
-              </a:rPr>
-              <a:t> = 250.0;</a:t>
-            </a:r>
-          </a:p>
-          <a:p>
-            <a:pPr>
-              <a:defRPr/>
-            </a:pPr>
-            <a:r>
-              <a:rPr lang="en-US" altLang="ko-KR" sz="1100" b="1" dirty="0">
-                <a:latin typeface="Courier New" pitchFamily="49" charset="0"/>
-                <a:ea typeface="굴림" pitchFamily="50" charset="-127"/>
-                <a:cs typeface="Courier New" pitchFamily="49" charset="0"/>
-              </a:rPr>
-              <a:t>                  </a:t>
-            </a:r>
-            <a:r>
-              <a:rPr lang="en-US" altLang="ko-KR" sz="1100" b="1" dirty="0" err="1">
-                <a:latin typeface="Courier New" pitchFamily="49" charset="0"/>
-                <a:ea typeface="굴림" pitchFamily="50" charset="-127"/>
-                <a:cs typeface="Courier New" pitchFamily="49" charset="0"/>
-              </a:rPr>
-              <a:t>System.out.println</a:t>
-            </a:r>
-            <a:r>
-              <a:rPr lang="en-US" altLang="ko-KR" sz="1100" b="1" dirty="0">
-                <a:latin typeface="Courier New" pitchFamily="49" charset="0"/>
-                <a:ea typeface="굴림" pitchFamily="50" charset="-127"/>
-                <a:cs typeface="Courier New" pitchFamily="49" charset="0"/>
-              </a:rPr>
-              <a:t> (</a:t>
-            </a:r>
-            <a:r>
-              <a:rPr lang="en-US" altLang="ko-KR" sz="1100" b="1" dirty="0" err="1">
-                <a:latin typeface="Courier New" pitchFamily="49" charset="0"/>
-                <a:ea typeface="굴림" pitchFamily="50" charset="-127"/>
-                <a:cs typeface="Courier New" pitchFamily="49" charset="0"/>
-              </a:rPr>
-              <a:t>ft.transName</a:t>
-            </a:r>
-            <a:r>
-              <a:rPr lang="en-US" altLang="ko-KR" sz="1100" b="1" dirty="0">
-                <a:latin typeface="Courier New" pitchFamily="49" charset="0"/>
-                <a:ea typeface="굴림" pitchFamily="50" charset="-127"/>
-                <a:cs typeface="Courier New" pitchFamily="49" charset="0"/>
-              </a:rPr>
-              <a:t> + " " + </a:t>
-            </a:r>
-            <a:r>
-              <a:rPr lang="en-US" altLang="ko-KR" sz="1100" b="1" dirty="0" err="1">
-                <a:latin typeface="Courier New" pitchFamily="49" charset="0"/>
-                <a:ea typeface="굴림" pitchFamily="50" charset="-127"/>
-                <a:cs typeface="Courier New" pitchFamily="49" charset="0"/>
-              </a:rPr>
-              <a:t>ft.amount</a:t>
-            </a:r>
-            <a:r>
-              <a:rPr lang="en-US" altLang="ko-KR" sz="1100" b="1" dirty="0">
-                <a:latin typeface="Courier New" pitchFamily="49" charset="0"/>
-                <a:ea typeface="굴림" pitchFamily="50" charset="-127"/>
-                <a:cs typeface="Courier New" pitchFamily="49" charset="0"/>
-              </a:rPr>
-              <a:t>);</a:t>
-            </a:r>
-          </a:p>
-          <a:p>
-            <a:pPr>
-              <a:defRPr/>
-            </a:pPr>
-            <a:r>
-              <a:rPr lang="en-US" altLang="ko-KR" sz="1100" b="1" dirty="0">
-                <a:latin typeface="Courier New" pitchFamily="49" charset="0"/>
-                <a:ea typeface="굴림" pitchFamily="50" charset="-127"/>
-                <a:cs typeface="Courier New" pitchFamily="49" charset="0"/>
-              </a:rPr>
-              <a:t>               }</a:t>
-            </a:r>
-          </a:p>
-          <a:p>
-            <a:pPr>
-              <a:defRPr/>
-            </a:pPr>
-            <a:r>
-              <a:rPr lang="en-US" altLang="ko-KR" sz="1100" b="1" dirty="0">
-                <a:latin typeface="Courier New" pitchFamily="49" charset="0"/>
-                <a:ea typeface="굴림" pitchFamily="50" charset="-127"/>
-                <a:cs typeface="Courier New" pitchFamily="49" charset="0"/>
-              </a:rPr>
-              <a:t>           }</a:t>
-            </a:r>
-          </a:p>
-          <a:p>
-            <a:pPr>
-              <a:defRPr/>
-            </a:pPr>
-            <a:r>
-              <a:rPr lang="en-US" altLang="ko-KR" sz="1100" b="1" dirty="0">
-                <a:latin typeface="Courier New" pitchFamily="49" charset="0"/>
-                <a:ea typeface="굴림" pitchFamily="50" charset="-127"/>
-                <a:cs typeface="Courier New" pitchFamily="49" charset="0"/>
-              </a:rPr>
-              <a:t>      }</a:t>
-            </a:r>
-          </a:p>
-          <a:p>
-            <a:pPr>
-              <a:defRPr/>
-            </a:pPr>
-            <a:r>
-              <a:rPr lang="en-US" altLang="ko-KR" sz="1100" b="1" dirty="0">
-                <a:latin typeface="Courier New" pitchFamily="49" charset="0"/>
-                <a:ea typeface="굴림" pitchFamily="50" charset="-127"/>
-                <a:cs typeface="Courier New" pitchFamily="49" charset="0"/>
-              </a:rPr>
-              <a:t>   }</a:t>
-            </a:r>
-          </a:p>
-          <a:p>
-            <a:pPr>
-              <a:defRPr/>
-            </a:pPr>
-            <a:r>
-              <a:rPr lang="en-US" altLang="ko-KR" sz="1100" b="1" dirty="0">
-                <a:latin typeface="Courier New" pitchFamily="49" charset="0"/>
-                <a:ea typeface="굴림" pitchFamily="50" charset="-127"/>
-                <a:cs typeface="Courier New" pitchFamily="49" charset="0"/>
-              </a:rPr>
-              <a:t>}</a:t>
-            </a:r>
-            <a:endParaRPr lang="ko-KR" altLang="en-US" sz="1100" dirty="0">
-              <a:latin typeface="굴림" pitchFamily="50" charset="-127"/>
-              <a:ea typeface="굴림" pitchFamily="50" charset="-127"/>
             </a:endParaRPr>
           </a:p>
         </p:txBody>
@@ -22272,6 +21475,1053 @@
       </p:grpSpPr>
       <p:sp>
         <p:nvSpPr>
+          <p:cNvPr id="48130" name="제목 1">
+            <a:extLst>
+              <a:ext uri="{FF2B5EF4-FFF2-40B4-BE49-F238E27FC236}">
+                <a16:creationId xmlns:a16="http://schemas.microsoft.com/office/drawing/2014/main" id="{4372F175-9974-454A-96C1-A4F69FA9A0E2}"/>
+              </a:ext>
+            </a:extLst>
+          </p:cNvPr>
+          <p:cNvSpPr>
+            <a:spLocks noGrp="1"/>
+          </p:cNvSpPr>
+          <p:nvPr>
+            <p:ph type="title"/>
+          </p:nvPr>
+        </p:nvSpPr>
+        <p:spPr/>
+        <p:txBody>
+          <a:bodyPr/>
+          <a:lstStyle/>
+          <a:p>
+            <a:endParaRPr lang="ko-KR" altLang="en-US"/>
+          </a:p>
+        </p:txBody>
+      </p:sp>
+      <p:sp>
+        <p:nvSpPr>
+          <p:cNvPr id="48131" name="내용 개체 틀 2">
+            <a:extLst>
+              <a:ext uri="{FF2B5EF4-FFF2-40B4-BE49-F238E27FC236}">
+                <a16:creationId xmlns:a16="http://schemas.microsoft.com/office/drawing/2014/main" id="{43252108-DD91-81CE-364B-4D8E7DB4F07E}"/>
+              </a:ext>
+            </a:extLst>
+          </p:cNvPr>
+          <p:cNvSpPr>
+            <a:spLocks noGrp="1"/>
+          </p:cNvSpPr>
+          <p:nvPr>
+            <p:ph idx="1"/>
+          </p:nvPr>
+        </p:nvSpPr>
+        <p:spPr/>
+        <p:txBody>
+          <a:bodyPr/>
+          <a:lstStyle/>
+          <a:p>
+            <a:endParaRPr lang="ko-KR" altLang="en-US"/>
+          </a:p>
+        </p:txBody>
+      </p:sp>
+      <p:sp>
+        <p:nvSpPr>
+          <p:cNvPr id="4" name="TextBox 3">
+            <a:extLst>
+              <a:ext uri="{FF2B5EF4-FFF2-40B4-BE49-F238E27FC236}">
+                <a16:creationId xmlns:a16="http://schemas.microsoft.com/office/drawing/2014/main" id="{FB40FC55-B9A9-D996-E2C2-FEE4EB711D66}"/>
+              </a:ext>
+            </a:extLst>
+          </p:cNvPr>
+          <p:cNvSpPr txBox="1"/>
+          <p:nvPr/>
+        </p:nvSpPr>
+        <p:spPr>
+          <a:xfrm>
+            <a:off x="827088" y="385763"/>
+            <a:ext cx="6132512" cy="6356350"/>
+          </a:xfrm>
+          <a:prstGeom prst="rect">
+            <a:avLst/>
+          </a:prstGeom>
+          <a:solidFill>
+            <a:schemeClr val="bg2">
+              <a:lumMod val="20000"/>
+              <a:lumOff val="80000"/>
+            </a:schemeClr>
+          </a:solidFill>
+          <a:ln>
+            <a:solidFill>
+              <a:schemeClr val="tx1"/>
+            </a:solidFill>
+          </a:ln>
+        </p:spPr>
+        <p:txBody>
+          <a:bodyPr wrap="none">
+            <a:spAutoFit/>
+          </a:bodyPr>
+          <a:lstStyle/>
+          <a:p>
+            <a:pPr>
+              <a:defRPr/>
+            </a:pPr>
+            <a:r>
+              <a:rPr lang="en-US" altLang="ko-KR" sz="1100" b="1" dirty="0">
+                <a:latin typeface="Courier New" pitchFamily="49" charset="0"/>
+                <a:ea typeface="굴림" pitchFamily="50" charset="-127"/>
+                <a:cs typeface="Courier New" pitchFamily="49" charset="0"/>
+              </a:rPr>
+              <a:t>class </a:t>
+            </a:r>
+            <a:r>
+              <a:rPr lang="en-US" altLang="ko-KR" sz="1100" b="1" dirty="0" err="1">
+                <a:latin typeface="Courier New" pitchFamily="49" charset="0"/>
+                <a:ea typeface="굴림" pitchFamily="50" charset="-127"/>
+                <a:cs typeface="Courier New" pitchFamily="49" charset="0"/>
+              </a:rPr>
+              <a:t>TransThread</a:t>
+            </a:r>
+            <a:r>
+              <a:rPr lang="en-US" altLang="ko-KR" sz="1100" b="1" dirty="0">
+                <a:latin typeface="Courier New" pitchFamily="49" charset="0"/>
+                <a:ea typeface="굴림" pitchFamily="50" charset="-127"/>
+                <a:cs typeface="Courier New" pitchFamily="49" charset="0"/>
+              </a:rPr>
+              <a:t> extends Thread</a:t>
+            </a:r>
+          </a:p>
+          <a:p>
+            <a:pPr>
+              <a:defRPr/>
+            </a:pPr>
+            <a:r>
+              <a:rPr lang="en-US" altLang="ko-KR" sz="1100" b="1" dirty="0">
+                <a:latin typeface="Courier New" pitchFamily="49" charset="0"/>
+                <a:ea typeface="굴림" pitchFamily="50" charset="-127"/>
+                <a:cs typeface="Courier New" pitchFamily="49" charset="0"/>
+              </a:rPr>
+              <a:t>{</a:t>
+            </a:r>
+          </a:p>
+          <a:p>
+            <a:pPr>
+              <a:defRPr/>
+            </a:pPr>
+            <a:r>
+              <a:rPr lang="en-US" altLang="ko-KR" sz="1100" b="1" dirty="0">
+                <a:latin typeface="Courier New" pitchFamily="49" charset="0"/>
+                <a:ea typeface="굴림" pitchFamily="50" charset="-127"/>
+                <a:cs typeface="Courier New" pitchFamily="49" charset="0"/>
+              </a:rPr>
+              <a:t>   private </a:t>
+            </a:r>
+            <a:r>
+              <a:rPr lang="en-US" altLang="ko-KR" sz="1100" b="1" dirty="0" err="1">
+                <a:latin typeface="Courier New" pitchFamily="49" charset="0"/>
+                <a:ea typeface="굴림" pitchFamily="50" charset="-127"/>
+                <a:cs typeface="Courier New" pitchFamily="49" charset="0"/>
+              </a:rPr>
+              <a:t>FinTrans</a:t>
+            </a:r>
+            <a:r>
+              <a:rPr lang="en-US" altLang="ko-KR" sz="1100" b="1" dirty="0">
+                <a:latin typeface="Courier New" pitchFamily="49" charset="0"/>
+                <a:ea typeface="굴림" pitchFamily="50" charset="-127"/>
+                <a:cs typeface="Courier New" pitchFamily="49" charset="0"/>
+              </a:rPr>
+              <a:t> ft;</a:t>
+            </a:r>
+          </a:p>
+          <a:p>
+            <a:pPr>
+              <a:defRPr/>
+            </a:pPr>
+            <a:r>
+              <a:rPr lang="en-US" altLang="ko-KR" sz="1100" b="1" dirty="0">
+                <a:latin typeface="Courier New" pitchFamily="49" charset="0"/>
+                <a:ea typeface="굴림" pitchFamily="50" charset="-127"/>
+                <a:cs typeface="Courier New" pitchFamily="49" charset="0"/>
+              </a:rPr>
+              <a:t>   </a:t>
+            </a:r>
+            <a:r>
+              <a:rPr lang="en-US" altLang="ko-KR" sz="1100" b="1" dirty="0" err="1">
+                <a:latin typeface="Courier New" pitchFamily="49" charset="0"/>
+                <a:ea typeface="굴림" pitchFamily="50" charset="-127"/>
+                <a:cs typeface="Courier New" pitchFamily="49" charset="0"/>
+              </a:rPr>
+              <a:t>TransThread</a:t>
+            </a:r>
+            <a:r>
+              <a:rPr lang="en-US" altLang="ko-KR" sz="1100" b="1" dirty="0">
+                <a:latin typeface="Courier New" pitchFamily="49" charset="0"/>
+                <a:ea typeface="굴림" pitchFamily="50" charset="-127"/>
+                <a:cs typeface="Courier New" pitchFamily="49" charset="0"/>
+              </a:rPr>
+              <a:t> (</a:t>
+            </a:r>
+            <a:r>
+              <a:rPr lang="en-US" altLang="ko-KR" sz="1100" b="1" dirty="0" err="1">
+                <a:latin typeface="Courier New" pitchFamily="49" charset="0"/>
+                <a:ea typeface="굴림" pitchFamily="50" charset="-127"/>
+                <a:cs typeface="Courier New" pitchFamily="49" charset="0"/>
+              </a:rPr>
+              <a:t>FinTrans</a:t>
+            </a:r>
+            <a:r>
+              <a:rPr lang="en-US" altLang="ko-KR" sz="1100" b="1" dirty="0">
+                <a:latin typeface="Courier New" pitchFamily="49" charset="0"/>
+                <a:ea typeface="굴림" pitchFamily="50" charset="-127"/>
+                <a:cs typeface="Courier New" pitchFamily="49" charset="0"/>
+              </a:rPr>
+              <a:t> ft, String name)</a:t>
+            </a:r>
+          </a:p>
+          <a:p>
+            <a:pPr>
+              <a:defRPr/>
+            </a:pPr>
+            <a:r>
+              <a:rPr lang="en-US" altLang="ko-KR" sz="1100" b="1" dirty="0">
+                <a:latin typeface="Courier New" pitchFamily="49" charset="0"/>
+                <a:ea typeface="굴림" pitchFamily="50" charset="-127"/>
+                <a:cs typeface="Courier New" pitchFamily="49" charset="0"/>
+              </a:rPr>
+              <a:t>   {</a:t>
+            </a:r>
+          </a:p>
+          <a:p>
+            <a:pPr>
+              <a:defRPr/>
+            </a:pPr>
+            <a:r>
+              <a:rPr lang="en-US" altLang="ko-KR" sz="1100" b="1" dirty="0">
+                <a:latin typeface="Courier New" pitchFamily="49" charset="0"/>
+                <a:ea typeface="굴림" pitchFamily="50" charset="-127"/>
+                <a:cs typeface="Courier New" pitchFamily="49" charset="0"/>
+              </a:rPr>
+              <a:t>      super (name); // Save thread's name</a:t>
+            </a:r>
+          </a:p>
+          <a:p>
+            <a:pPr>
+              <a:defRPr/>
+            </a:pPr>
+            <a:r>
+              <a:rPr lang="en-US" altLang="ko-KR" sz="1100" b="1" dirty="0">
+                <a:latin typeface="Courier New" pitchFamily="49" charset="0"/>
+                <a:ea typeface="굴림" pitchFamily="50" charset="-127"/>
+                <a:cs typeface="Courier New" pitchFamily="49" charset="0"/>
+              </a:rPr>
+              <a:t>      </a:t>
+            </a:r>
+            <a:r>
+              <a:rPr lang="en-US" altLang="ko-KR" sz="1100" b="1" dirty="0" err="1">
+                <a:latin typeface="Courier New" pitchFamily="49" charset="0"/>
+                <a:ea typeface="굴림" pitchFamily="50" charset="-127"/>
+                <a:cs typeface="Courier New" pitchFamily="49" charset="0"/>
+              </a:rPr>
+              <a:t>this.ft</a:t>
+            </a:r>
+            <a:r>
+              <a:rPr lang="en-US" altLang="ko-KR" sz="1100" b="1" dirty="0">
+                <a:latin typeface="Courier New" pitchFamily="49" charset="0"/>
+                <a:ea typeface="굴림" pitchFamily="50" charset="-127"/>
+                <a:cs typeface="Courier New" pitchFamily="49" charset="0"/>
+              </a:rPr>
+              <a:t> = ft; // Save reference to financial transaction object</a:t>
+            </a:r>
+          </a:p>
+          <a:p>
+            <a:pPr>
+              <a:defRPr/>
+            </a:pPr>
+            <a:r>
+              <a:rPr lang="en-US" altLang="ko-KR" sz="1100" b="1" dirty="0">
+                <a:latin typeface="Courier New" pitchFamily="49" charset="0"/>
+                <a:ea typeface="굴림" pitchFamily="50" charset="-127"/>
+                <a:cs typeface="Courier New" pitchFamily="49" charset="0"/>
+              </a:rPr>
+              <a:t>   }</a:t>
+            </a:r>
+          </a:p>
+          <a:p>
+            <a:pPr>
+              <a:defRPr/>
+            </a:pPr>
+            <a:r>
+              <a:rPr lang="en-US" altLang="ko-KR" sz="1100" b="1" dirty="0">
+                <a:latin typeface="Courier New" pitchFamily="49" charset="0"/>
+                <a:ea typeface="굴림" pitchFamily="50" charset="-127"/>
+                <a:cs typeface="Courier New" pitchFamily="49" charset="0"/>
+              </a:rPr>
+              <a:t>   public void run ()</a:t>
+            </a:r>
+          </a:p>
+          <a:p>
+            <a:pPr>
+              <a:defRPr/>
+            </a:pPr>
+            <a:r>
+              <a:rPr lang="en-US" altLang="ko-KR" sz="1100" b="1" dirty="0">
+                <a:latin typeface="Courier New" pitchFamily="49" charset="0"/>
+                <a:ea typeface="굴림" pitchFamily="50" charset="-127"/>
+                <a:cs typeface="Courier New" pitchFamily="49" charset="0"/>
+              </a:rPr>
+              <a:t>   {</a:t>
+            </a:r>
+          </a:p>
+          <a:p>
+            <a:pPr>
+              <a:defRPr/>
+            </a:pPr>
+            <a:r>
+              <a:rPr lang="en-US" altLang="ko-KR" sz="1100" b="1" dirty="0">
+                <a:latin typeface="Courier New" pitchFamily="49" charset="0"/>
+                <a:ea typeface="굴림" pitchFamily="50" charset="-127"/>
+                <a:cs typeface="Courier New" pitchFamily="49" charset="0"/>
+              </a:rPr>
+              <a:t>      for (</a:t>
+            </a:r>
+            <a:r>
+              <a:rPr lang="en-US" altLang="ko-KR" sz="1100" b="1" dirty="0" err="1">
+                <a:latin typeface="Courier New" pitchFamily="49" charset="0"/>
+                <a:ea typeface="굴림" pitchFamily="50" charset="-127"/>
+                <a:cs typeface="Courier New" pitchFamily="49" charset="0"/>
+              </a:rPr>
+              <a:t>int</a:t>
+            </a:r>
+            <a:r>
+              <a:rPr lang="en-US" altLang="ko-KR" sz="1100" b="1" dirty="0">
+                <a:latin typeface="Courier New" pitchFamily="49" charset="0"/>
+                <a:ea typeface="굴림" pitchFamily="50" charset="-127"/>
+                <a:cs typeface="Courier New" pitchFamily="49" charset="0"/>
+              </a:rPr>
+              <a:t> </a:t>
+            </a:r>
+            <a:r>
+              <a:rPr lang="en-US" altLang="ko-KR" sz="1100" b="1" dirty="0" err="1">
+                <a:latin typeface="Courier New" pitchFamily="49" charset="0"/>
+                <a:ea typeface="굴림" pitchFamily="50" charset="-127"/>
+                <a:cs typeface="Courier New" pitchFamily="49" charset="0"/>
+              </a:rPr>
+              <a:t>i</a:t>
+            </a:r>
+            <a:r>
+              <a:rPr lang="en-US" altLang="ko-KR" sz="1100" b="1" dirty="0">
+                <a:latin typeface="Courier New" pitchFamily="49" charset="0"/>
+                <a:ea typeface="굴림" pitchFamily="50" charset="-127"/>
+                <a:cs typeface="Courier New" pitchFamily="49" charset="0"/>
+              </a:rPr>
+              <a:t> = 0; </a:t>
+            </a:r>
+            <a:r>
+              <a:rPr lang="en-US" altLang="ko-KR" sz="1100" b="1" dirty="0" err="1">
+                <a:latin typeface="Courier New" pitchFamily="49" charset="0"/>
+                <a:ea typeface="굴림" pitchFamily="50" charset="-127"/>
+                <a:cs typeface="Courier New" pitchFamily="49" charset="0"/>
+              </a:rPr>
+              <a:t>i</a:t>
+            </a:r>
+            <a:r>
+              <a:rPr lang="en-US" altLang="ko-KR" sz="1100" b="1" dirty="0">
+                <a:latin typeface="Courier New" pitchFamily="49" charset="0"/>
+                <a:ea typeface="굴림" pitchFamily="50" charset="-127"/>
+                <a:cs typeface="Courier New" pitchFamily="49" charset="0"/>
+              </a:rPr>
+              <a:t> &lt; 100; </a:t>
+            </a:r>
+            <a:r>
+              <a:rPr lang="en-US" altLang="ko-KR" sz="1100" b="1" dirty="0" err="1">
+                <a:latin typeface="Courier New" pitchFamily="49" charset="0"/>
+                <a:ea typeface="굴림" pitchFamily="50" charset="-127"/>
+                <a:cs typeface="Courier New" pitchFamily="49" charset="0"/>
+              </a:rPr>
+              <a:t>i</a:t>
+            </a:r>
+            <a:r>
+              <a:rPr lang="en-US" altLang="ko-KR" sz="1100" b="1" dirty="0">
+                <a:latin typeface="Courier New" pitchFamily="49" charset="0"/>
+                <a:ea typeface="굴림" pitchFamily="50" charset="-127"/>
+                <a:cs typeface="Courier New" pitchFamily="49" charset="0"/>
+              </a:rPr>
+              <a:t>++){</a:t>
+            </a:r>
+          </a:p>
+          <a:p>
+            <a:pPr>
+              <a:defRPr/>
+            </a:pPr>
+            <a:r>
+              <a:rPr lang="en-US" altLang="ko-KR" sz="1100" b="1" dirty="0">
+                <a:latin typeface="Courier New" pitchFamily="49" charset="0"/>
+                <a:ea typeface="굴림" pitchFamily="50" charset="-127"/>
+                <a:cs typeface="Courier New" pitchFamily="49" charset="0"/>
+              </a:rPr>
+              <a:t>           if (</a:t>
+            </a:r>
+            <a:r>
+              <a:rPr lang="en-US" altLang="ko-KR" sz="1100" b="1" dirty="0" err="1">
+                <a:latin typeface="Courier New" pitchFamily="49" charset="0"/>
+                <a:ea typeface="굴림" pitchFamily="50" charset="-127"/>
+                <a:cs typeface="Courier New" pitchFamily="49" charset="0"/>
+              </a:rPr>
+              <a:t>getName</a:t>
+            </a:r>
+            <a:r>
+              <a:rPr lang="en-US" altLang="ko-KR" sz="1100" b="1" dirty="0">
+                <a:latin typeface="Courier New" pitchFamily="49" charset="0"/>
+                <a:ea typeface="굴림" pitchFamily="50" charset="-127"/>
+                <a:cs typeface="Courier New" pitchFamily="49" charset="0"/>
+              </a:rPr>
+              <a:t> ().equals ("Deposit Thread"))</a:t>
+            </a:r>
+          </a:p>
+          <a:p>
+            <a:pPr>
+              <a:defRPr/>
+            </a:pPr>
+            <a:r>
+              <a:rPr lang="en-US" altLang="ko-KR" sz="1100" b="1" dirty="0">
+                <a:latin typeface="Courier New" pitchFamily="49" charset="0"/>
+                <a:ea typeface="굴림" pitchFamily="50" charset="-127"/>
+                <a:cs typeface="Courier New" pitchFamily="49" charset="0"/>
+              </a:rPr>
+              <a:t>           {</a:t>
+            </a:r>
+          </a:p>
+          <a:p>
+            <a:pPr>
+              <a:defRPr/>
+            </a:pPr>
+            <a:r>
+              <a:rPr lang="en-US" altLang="ko-KR" sz="1100" b="1" dirty="0">
+                <a:latin typeface="Courier New" pitchFamily="49" charset="0"/>
+                <a:ea typeface="굴림" pitchFamily="50" charset="-127"/>
+                <a:cs typeface="Courier New" pitchFamily="49" charset="0"/>
+              </a:rPr>
+              <a:t>               synchronized (ft){</a:t>
+            </a:r>
+          </a:p>
+          <a:p>
+            <a:pPr>
+              <a:defRPr/>
+            </a:pPr>
+            <a:r>
+              <a:rPr lang="en-US" altLang="ko-KR" sz="1100" b="1" dirty="0">
+                <a:latin typeface="Courier New" pitchFamily="49" charset="0"/>
+                <a:ea typeface="굴림" pitchFamily="50" charset="-127"/>
+                <a:cs typeface="Courier New" pitchFamily="49" charset="0"/>
+              </a:rPr>
+              <a:t>                  </a:t>
+            </a:r>
+            <a:r>
+              <a:rPr lang="en-US" altLang="ko-KR" sz="1100" b="1" dirty="0" err="1">
+                <a:latin typeface="Courier New" pitchFamily="49" charset="0"/>
+                <a:ea typeface="굴림" pitchFamily="50" charset="-127"/>
+                <a:cs typeface="Courier New" pitchFamily="49" charset="0"/>
+              </a:rPr>
+              <a:t>ft.transName</a:t>
+            </a:r>
+            <a:r>
+              <a:rPr lang="en-US" altLang="ko-KR" sz="1100" b="1" dirty="0">
+                <a:latin typeface="Courier New" pitchFamily="49" charset="0"/>
+                <a:ea typeface="굴림" pitchFamily="50" charset="-127"/>
+                <a:cs typeface="Courier New" pitchFamily="49" charset="0"/>
+              </a:rPr>
+              <a:t> = "Deposit";</a:t>
+            </a:r>
+          </a:p>
+          <a:p>
+            <a:pPr>
+              <a:defRPr/>
+            </a:pPr>
+            <a:r>
+              <a:rPr lang="en-US" altLang="ko-KR" sz="1100" b="1" dirty="0">
+                <a:latin typeface="Courier New" pitchFamily="49" charset="0"/>
+                <a:ea typeface="굴림" pitchFamily="50" charset="-127"/>
+                <a:cs typeface="Courier New" pitchFamily="49" charset="0"/>
+              </a:rPr>
+              <a:t>                  try{</a:t>
+            </a:r>
+          </a:p>
+          <a:p>
+            <a:pPr>
+              <a:defRPr/>
+            </a:pPr>
+            <a:r>
+              <a:rPr lang="en-US" altLang="ko-KR" sz="1100" b="1" dirty="0">
+                <a:latin typeface="Courier New" pitchFamily="49" charset="0"/>
+                <a:ea typeface="굴림" pitchFamily="50" charset="-127"/>
+                <a:cs typeface="Courier New" pitchFamily="49" charset="0"/>
+              </a:rPr>
+              <a:t>                     </a:t>
+            </a:r>
+            <a:r>
+              <a:rPr lang="en-US" altLang="ko-KR" sz="1100" b="1" dirty="0" err="1">
+                <a:latin typeface="Courier New" pitchFamily="49" charset="0"/>
+                <a:ea typeface="굴림" pitchFamily="50" charset="-127"/>
+                <a:cs typeface="Courier New" pitchFamily="49" charset="0"/>
+              </a:rPr>
+              <a:t>Thread.sleep</a:t>
+            </a:r>
+            <a:r>
+              <a:rPr lang="en-US" altLang="ko-KR" sz="1100" b="1" dirty="0">
+                <a:latin typeface="Courier New" pitchFamily="49" charset="0"/>
+                <a:ea typeface="굴림" pitchFamily="50" charset="-127"/>
+                <a:cs typeface="Courier New" pitchFamily="49" charset="0"/>
+              </a:rPr>
+              <a:t> ((</a:t>
+            </a:r>
+            <a:r>
+              <a:rPr lang="en-US" altLang="ko-KR" sz="1100" b="1" dirty="0" err="1">
+                <a:latin typeface="Courier New" pitchFamily="49" charset="0"/>
+                <a:ea typeface="굴림" pitchFamily="50" charset="-127"/>
+                <a:cs typeface="Courier New" pitchFamily="49" charset="0"/>
+              </a:rPr>
+              <a:t>int</a:t>
+            </a:r>
+            <a:r>
+              <a:rPr lang="en-US" altLang="ko-KR" sz="1100" b="1" dirty="0">
+                <a:latin typeface="Courier New" pitchFamily="49" charset="0"/>
+                <a:ea typeface="굴림" pitchFamily="50" charset="-127"/>
+                <a:cs typeface="Courier New" pitchFamily="49" charset="0"/>
+              </a:rPr>
+              <a:t>) (</a:t>
+            </a:r>
+            <a:r>
+              <a:rPr lang="en-US" altLang="ko-KR" sz="1100" b="1" dirty="0" err="1">
+                <a:latin typeface="Courier New" pitchFamily="49" charset="0"/>
+                <a:ea typeface="굴림" pitchFamily="50" charset="-127"/>
+                <a:cs typeface="Courier New" pitchFamily="49" charset="0"/>
+              </a:rPr>
+              <a:t>Math.random</a:t>
+            </a:r>
+            <a:r>
+              <a:rPr lang="en-US" altLang="ko-KR" sz="1100" b="1" dirty="0">
+                <a:latin typeface="Courier New" pitchFamily="49" charset="0"/>
+                <a:ea typeface="굴림" pitchFamily="50" charset="-127"/>
+                <a:cs typeface="Courier New" pitchFamily="49" charset="0"/>
+              </a:rPr>
+              <a:t> () * 1000));</a:t>
+            </a:r>
+          </a:p>
+          <a:p>
+            <a:pPr>
+              <a:defRPr/>
+            </a:pPr>
+            <a:r>
+              <a:rPr lang="en-US" altLang="ko-KR" sz="1100" b="1" dirty="0">
+                <a:latin typeface="Courier New" pitchFamily="49" charset="0"/>
+                <a:ea typeface="굴림" pitchFamily="50" charset="-127"/>
+                <a:cs typeface="Courier New" pitchFamily="49" charset="0"/>
+              </a:rPr>
+              <a:t>                  }</a:t>
+            </a:r>
+          </a:p>
+          <a:p>
+            <a:pPr>
+              <a:defRPr/>
+            </a:pPr>
+            <a:r>
+              <a:rPr lang="en-US" altLang="ko-KR" sz="1100" b="1" dirty="0">
+                <a:latin typeface="Courier New" pitchFamily="49" charset="0"/>
+                <a:ea typeface="굴림" pitchFamily="50" charset="-127"/>
+                <a:cs typeface="Courier New" pitchFamily="49" charset="0"/>
+              </a:rPr>
+              <a:t>                  catch (</a:t>
+            </a:r>
+            <a:r>
+              <a:rPr lang="en-US" altLang="ko-KR" sz="1100" b="1" dirty="0" err="1">
+                <a:latin typeface="Courier New" pitchFamily="49" charset="0"/>
+                <a:ea typeface="굴림" pitchFamily="50" charset="-127"/>
+                <a:cs typeface="Courier New" pitchFamily="49" charset="0"/>
+              </a:rPr>
+              <a:t>InterruptedException</a:t>
+            </a:r>
+            <a:r>
+              <a:rPr lang="en-US" altLang="ko-KR" sz="1100" b="1" dirty="0">
+                <a:latin typeface="Courier New" pitchFamily="49" charset="0"/>
+                <a:ea typeface="굴림" pitchFamily="50" charset="-127"/>
+                <a:cs typeface="Courier New" pitchFamily="49" charset="0"/>
+              </a:rPr>
+              <a:t> e) {}</a:t>
+            </a:r>
+          </a:p>
+          <a:p>
+            <a:pPr>
+              <a:defRPr/>
+            </a:pPr>
+            <a:r>
+              <a:rPr lang="en-US" altLang="ko-KR" sz="1100" b="1" dirty="0">
+                <a:latin typeface="Courier New" pitchFamily="49" charset="0"/>
+                <a:ea typeface="굴림" pitchFamily="50" charset="-127"/>
+                <a:cs typeface="Courier New" pitchFamily="49" charset="0"/>
+              </a:rPr>
+              <a:t>                  </a:t>
+            </a:r>
+            <a:r>
+              <a:rPr lang="en-US" altLang="ko-KR" sz="1100" b="1" dirty="0" err="1">
+                <a:latin typeface="Courier New" pitchFamily="49" charset="0"/>
+                <a:ea typeface="굴림" pitchFamily="50" charset="-127"/>
+                <a:cs typeface="Courier New" pitchFamily="49" charset="0"/>
+              </a:rPr>
+              <a:t>ft.amount</a:t>
+            </a:r>
+            <a:r>
+              <a:rPr lang="en-US" altLang="ko-KR" sz="1100" b="1" dirty="0">
+                <a:latin typeface="Courier New" pitchFamily="49" charset="0"/>
+                <a:ea typeface="굴림" pitchFamily="50" charset="-127"/>
+                <a:cs typeface="Courier New" pitchFamily="49" charset="0"/>
+              </a:rPr>
+              <a:t> = 2000.0;</a:t>
+            </a:r>
+          </a:p>
+          <a:p>
+            <a:pPr>
+              <a:defRPr/>
+            </a:pPr>
+            <a:r>
+              <a:rPr lang="en-US" altLang="ko-KR" sz="1100" b="1" dirty="0">
+                <a:latin typeface="Courier New" pitchFamily="49" charset="0"/>
+                <a:ea typeface="굴림" pitchFamily="50" charset="-127"/>
+                <a:cs typeface="Courier New" pitchFamily="49" charset="0"/>
+              </a:rPr>
+              <a:t>                  </a:t>
+            </a:r>
+            <a:r>
+              <a:rPr lang="en-US" altLang="ko-KR" sz="1100" b="1" dirty="0" err="1">
+                <a:latin typeface="Courier New" pitchFamily="49" charset="0"/>
+                <a:ea typeface="굴림" pitchFamily="50" charset="-127"/>
+                <a:cs typeface="Courier New" pitchFamily="49" charset="0"/>
+              </a:rPr>
+              <a:t>System.out.println</a:t>
+            </a:r>
+            <a:r>
+              <a:rPr lang="en-US" altLang="ko-KR" sz="1100" b="1" dirty="0">
+                <a:latin typeface="Courier New" pitchFamily="49" charset="0"/>
+                <a:ea typeface="굴림" pitchFamily="50" charset="-127"/>
+                <a:cs typeface="Courier New" pitchFamily="49" charset="0"/>
+              </a:rPr>
+              <a:t> (</a:t>
+            </a:r>
+            <a:r>
+              <a:rPr lang="en-US" altLang="ko-KR" sz="1100" b="1" dirty="0" err="1">
+                <a:latin typeface="Courier New" pitchFamily="49" charset="0"/>
+                <a:ea typeface="굴림" pitchFamily="50" charset="-127"/>
+                <a:cs typeface="Courier New" pitchFamily="49" charset="0"/>
+              </a:rPr>
+              <a:t>ft.transName</a:t>
+            </a:r>
+            <a:r>
+              <a:rPr lang="en-US" altLang="ko-KR" sz="1100" b="1" dirty="0">
+                <a:latin typeface="Courier New" pitchFamily="49" charset="0"/>
+                <a:ea typeface="굴림" pitchFamily="50" charset="-127"/>
+                <a:cs typeface="Courier New" pitchFamily="49" charset="0"/>
+              </a:rPr>
+              <a:t> + " " + </a:t>
+            </a:r>
+            <a:r>
+              <a:rPr lang="en-US" altLang="ko-KR" sz="1100" b="1" dirty="0" err="1">
+                <a:latin typeface="Courier New" pitchFamily="49" charset="0"/>
+                <a:ea typeface="굴림" pitchFamily="50" charset="-127"/>
+                <a:cs typeface="Courier New" pitchFamily="49" charset="0"/>
+              </a:rPr>
+              <a:t>ft.amount</a:t>
+            </a:r>
+            <a:r>
+              <a:rPr lang="en-US" altLang="ko-KR" sz="1100" b="1" dirty="0">
+                <a:latin typeface="Courier New" pitchFamily="49" charset="0"/>
+                <a:ea typeface="굴림" pitchFamily="50" charset="-127"/>
+                <a:cs typeface="Courier New" pitchFamily="49" charset="0"/>
+              </a:rPr>
+              <a:t>);</a:t>
+            </a:r>
+          </a:p>
+          <a:p>
+            <a:pPr>
+              <a:defRPr/>
+            </a:pPr>
+            <a:r>
+              <a:rPr lang="en-US" altLang="ko-KR" sz="1100" b="1" dirty="0">
+                <a:latin typeface="Courier New" pitchFamily="49" charset="0"/>
+                <a:ea typeface="굴림" pitchFamily="50" charset="-127"/>
+                <a:cs typeface="Courier New" pitchFamily="49" charset="0"/>
+              </a:rPr>
+              <a:t>               }</a:t>
+            </a:r>
+          </a:p>
+          <a:p>
+            <a:pPr>
+              <a:defRPr/>
+            </a:pPr>
+            <a:r>
+              <a:rPr lang="en-US" altLang="ko-KR" sz="1100" b="1" dirty="0">
+                <a:latin typeface="Courier New" pitchFamily="49" charset="0"/>
+                <a:ea typeface="굴림" pitchFamily="50" charset="-127"/>
+                <a:cs typeface="Courier New" pitchFamily="49" charset="0"/>
+              </a:rPr>
+              <a:t>           }</a:t>
+            </a:r>
+          </a:p>
+          <a:p>
+            <a:pPr>
+              <a:defRPr/>
+            </a:pPr>
+            <a:r>
+              <a:rPr lang="en-US" altLang="ko-KR" sz="1100" b="1" dirty="0">
+                <a:latin typeface="Courier New" pitchFamily="49" charset="0"/>
+                <a:ea typeface="굴림" pitchFamily="50" charset="-127"/>
+                <a:cs typeface="Courier New" pitchFamily="49" charset="0"/>
+              </a:rPr>
+              <a:t>           else {</a:t>
+            </a:r>
+          </a:p>
+          <a:p>
+            <a:pPr>
+              <a:defRPr/>
+            </a:pPr>
+            <a:r>
+              <a:rPr lang="en-US" altLang="ko-KR" sz="1100" b="1" dirty="0">
+                <a:latin typeface="Courier New" pitchFamily="49" charset="0"/>
+                <a:ea typeface="굴림" pitchFamily="50" charset="-127"/>
+                <a:cs typeface="Courier New" pitchFamily="49" charset="0"/>
+              </a:rPr>
+              <a:t>               synchronized (ft){</a:t>
+            </a:r>
+          </a:p>
+          <a:p>
+            <a:pPr>
+              <a:defRPr/>
+            </a:pPr>
+            <a:r>
+              <a:rPr lang="en-US" altLang="ko-KR" sz="1100" b="1" dirty="0">
+                <a:latin typeface="Courier New" pitchFamily="49" charset="0"/>
+                <a:ea typeface="굴림" pitchFamily="50" charset="-127"/>
+                <a:cs typeface="Courier New" pitchFamily="49" charset="0"/>
+              </a:rPr>
+              <a:t>                  </a:t>
+            </a:r>
+            <a:r>
+              <a:rPr lang="en-US" altLang="ko-KR" sz="1100" b="1" dirty="0" err="1">
+                <a:latin typeface="Courier New" pitchFamily="49" charset="0"/>
+                <a:ea typeface="굴림" pitchFamily="50" charset="-127"/>
+                <a:cs typeface="Courier New" pitchFamily="49" charset="0"/>
+              </a:rPr>
+              <a:t>ft.transName</a:t>
+            </a:r>
+            <a:r>
+              <a:rPr lang="en-US" altLang="ko-KR" sz="1100" b="1" dirty="0">
+                <a:latin typeface="Courier New" pitchFamily="49" charset="0"/>
+                <a:ea typeface="굴림" pitchFamily="50" charset="-127"/>
+                <a:cs typeface="Courier New" pitchFamily="49" charset="0"/>
+              </a:rPr>
+              <a:t> = "Withdrawal";</a:t>
+            </a:r>
+          </a:p>
+          <a:p>
+            <a:pPr>
+              <a:defRPr/>
+            </a:pPr>
+            <a:r>
+              <a:rPr lang="en-US" altLang="ko-KR" sz="1100" b="1" dirty="0">
+                <a:latin typeface="Courier New" pitchFamily="49" charset="0"/>
+                <a:ea typeface="굴림" pitchFamily="50" charset="-127"/>
+                <a:cs typeface="Courier New" pitchFamily="49" charset="0"/>
+              </a:rPr>
+              <a:t>                  try {</a:t>
+            </a:r>
+          </a:p>
+          <a:p>
+            <a:pPr>
+              <a:defRPr/>
+            </a:pPr>
+            <a:r>
+              <a:rPr lang="en-US" altLang="ko-KR" sz="1100" b="1" dirty="0">
+                <a:latin typeface="Courier New" pitchFamily="49" charset="0"/>
+                <a:ea typeface="굴림" pitchFamily="50" charset="-127"/>
+                <a:cs typeface="Courier New" pitchFamily="49" charset="0"/>
+              </a:rPr>
+              <a:t>                     </a:t>
+            </a:r>
+            <a:r>
+              <a:rPr lang="en-US" altLang="ko-KR" sz="1100" b="1" dirty="0" err="1">
+                <a:latin typeface="Courier New" pitchFamily="49" charset="0"/>
+                <a:ea typeface="굴림" pitchFamily="50" charset="-127"/>
+                <a:cs typeface="Courier New" pitchFamily="49" charset="0"/>
+              </a:rPr>
+              <a:t>Thread.sleep</a:t>
+            </a:r>
+            <a:r>
+              <a:rPr lang="en-US" altLang="ko-KR" sz="1100" b="1" dirty="0">
+                <a:latin typeface="Courier New" pitchFamily="49" charset="0"/>
+                <a:ea typeface="굴림" pitchFamily="50" charset="-127"/>
+                <a:cs typeface="Courier New" pitchFamily="49" charset="0"/>
+              </a:rPr>
+              <a:t> ((</a:t>
+            </a:r>
+            <a:r>
+              <a:rPr lang="en-US" altLang="ko-KR" sz="1100" b="1" dirty="0" err="1">
+                <a:latin typeface="Courier New" pitchFamily="49" charset="0"/>
+                <a:ea typeface="굴림" pitchFamily="50" charset="-127"/>
+                <a:cs typeface="Courier New" pitchFamily="49" charset="0"/>
+              </a:rPr>
+              <a:t>int</a:t>
+            </a:r>
+            <a:r>
+              <a:rPr lang="en-US" altLang="ko-KR" sz="1100" b="1" dirty="0">
+                <a:latin typeface="Courier New" pitchFamily="49" charset="0"/>
+                <a:ea typeface="굴림" pitchFamily="50" charset="-127"/>
+                <a:cs typeface="Courier New" pitchFamily="49" charset="0"/>
+              </a:rPr>
+              <a:t>) (</a:t>
+            </a:r>
+            <a:r>
+              <a:rPr lang="en-US" altLang="ko-KR" sz="1100" b="1" dirty="0" err="1">
+                <a:latin typeface="Courier New" pitchFamily="49" charset="0"/>
+                <a:ea typeface="굴림" pitchFamily="50" charset="-127"/>
+                <a:cs typeface="Courier New" pitchFamily="49" charset="0"/>
+              </a:rPr>
+              <a:t>Math.random</a:t>
+            </a:r>
+            <a:r>
+              <a:rPr lang="en-US" altLang="ko-KR" sz="1100" b="1" dirty="0">
+                <a:latin typeface="Courier New" pitchFamily="49" charset="0"/>
+                <a:ea typeface="굴림" pitchFamily="50" charset="-127"/>
+                <a:cs typeface="Courier New" pitchFamily="49" charset="0"/>
+              </a:rPr>
+              <a:t> () * 1000));</a:t>
+            </a:r>
+          </a:p>
+          <a:p>
+            <a:pPr>
+              <a:defRPr/>
+            </a:pPr>
+            <a:r>
+              <a:rPr lang="en-US" altLang="ko-KR" sz="1100" b="1" dirty="0">
+                <a:latin typeface="Courier New" pitchFamily="49" charset="0"/>
+                <a:ea typeface="굴림" pitchFamily="50" charset="-127"/>
+                <a:cs typeface="Courier New" pitchFamily="49" charset="0"/>
+              </a:rPr>
+              <a:t>                  }</a:t>
+            </a:r>
+          </a:p>
+          <a:p>
+            <a:pPr>
+              <a:defRPr/>
+            </a:pPr>
+            <a:r>
+              <a:rPr lang="en-US" altLang="ko-KR" sz="1100" b="1" dirty="0">
+                <a:latin typeface="Courier New" pitchFamily="49" charset="0"/>
+                <a:ea typeface="굴림" pitchFamily="50" charset="-127"/>
+                <a:cs typeface="Courier New" pitchFamily="49" charset="0"/>
+              </a:rPr>
+              <a:t>                  catch (</a:t>
+            </a:r>
+            <a:r>
+              <a:rPr lang="en-US" altLang="ko-KR" sz="1100" b="1" dirty="0" err="1">
+                <a:latin typeface="Courier New" pitchFamily="49" charset="0"/>
+                <a:ea typeface="굴림" pitchFamily="50" charset="-127"/>
+                <a:cs typeface="Courier New" pitchFamily="49" charset="0"/>
+              </a:rPr>
+              <a:t>InterruptedException</a:t>
+            </a:r>
+            <a:r>
+              <a:rPr lang="en-US" altLang="ko-KR" sz="1100" b="1" dirty="0">
+                <a:latin typeface="Courier New" pitchFamily="49" charset="0"/>
+                <a:ea typeface="굴림" pitchFamily="50" charset="-127"/>
+                <a:cs typeface="Courier New" pitchFamily="49" charset="0"/>
+              </a:rPr>
+              <a:t> e) {}</a:t>
+            </a:r>
+          </a:p>
+          <a:p>
+            <a:pPr>
+              <a:defRPr/>
+            </a:pPr>
+            <a:r>
+              <a:rPr lang="en-US" altLang="ko-KR" sz="1100" b="1" dirty="0">
+                <a:latin typeface="Courier New" pitchFamily="49" charset="0"/>
+                <a:ea typeface="굴림" pitchFamily="50" charset="-127"/>
+                <a:cs typeface="Courier New" pitchFamily="49" charset="0"/>
+              </a:rPr>
+              <a:t>                  </a:t>
+            </a:r>
+            <a:r>
+              <a:rPr lang="en-US" altLang="ko-KR" sz="1100" b="1" dirty="0" err="1">
+                <a:latin typeface="Courier New" pitchFamily="49" charset="0"/>
+                <a:ea typeface="굴림" pitchFamily="50" charset="-127"/>
+                <a:cs typeface="Courier New" pitchFamily="49" charset="0"/>
+              </a:rPr>
+              <a:t>ft.amount</a:t>
+            </a:r>
+            <a:r>
+              <a:rPr lang="en-US" altLang="ko-KR" sz="1100" b="1" dirty="0">
+                <a:latin typeface="Courier New" pitchFamily="49" charset="0"/>
+                <a:ea typeface="굴림" pitchFamily="50" charset="-127"/>
+                <a:cs typeface="Courier New" pitchFamily="49" charset="0"/>
+              </a:rPr>
+              <a:t> = 250.0;</a:t>
+            </a:r>
+          </a:p>
+          <a:p>
+            <a:pPr>
+              <a:defRPr/>
+            </a:pPr>
+            <a:r>
+              <a:rPr lang="en-US" altLang="ko-KR" sz="1100" b="1" dirty="0">
+                <a:latin typeface="Courier New" pitchFamily="49" charset="0"/>
+                <a:ea typeface="굴림" pitchFamily="50" charset="-127"/>
+                <a:cs typeface="Courier New" pitchFamily="49" charset="0"/>
+              </a:rPr>
+              <a:t>                  </a:t>
+            </a:r>
+            <a:r>
+              <a:rPr lang="en-US" altLang="ko-KR" sz="1100" b="1" dirty="0" err="1">
+                <a:latin typeface="Courier New" pitchFamily="49" charset="0"/>
+                <a:ea typeface="굴림" pitchFamily="50" charset="-127"/>
+                <a:cs typeface="Courier New" pitchFamily="49" charset="0"/>
+              </a:rPr>
+              <a:t>System.out.println</a:t>
+            </a:r>
+            <a:r>
+              <a:rPr lang="en-US" altLang="ko-KR" sz="1100" b="1" dirty="0">
+                <a:latin typeface="Courier New" pitchFamily="49" charset="0"/>
+                <a:ea typeface="굴림" pitchFamily="50" charset="-127"/>
+                <a:cs typeface="Courier New" pitchFamily="49" charset="0"/>
+              </a:rPr>
+              <a:t> (</a:t>
+            </a:r>
+            <a:r>
+              <a:rPr lang="en-US" altLang="ko-KR" sz="1100" b="1" dirty="0" err="1">
+                <a:latin typeface="Courier New" pitchFamily="49" charset="0"/>
+                <a:ea typeface="굴림" pitchFamily="50" charset="-127"/>
+                <a:cs typeface="Courier New" pitchFamily="49" charset="0"/>
+              </a:rPr>
+              <a:t>ft.transName</a:t>
+            </a:r>
+            <a:r>
+              <a:rPr lang="en-US" altLang="ko-KR" sz="1100" b="1" dirty="0">
+                <a:latin typeface="Courier New" pitchFamily="49" charset="0"/>
+                <a:ea typeface="굴림" pitchFamily="50" charset="-127"/>
+                <a:cs typeface="Courier New" pitchFamily="49" charset="0"/>
+              </a:rPr>
+              <a:t> + " " + </a:t>
+            </a:r>
+            <a:r>
+              <a:rPr lang="en-US" altLang="ko-KR" sz="1100" b="1" dirty="0" err="1">
+                <a:latin typeface="Courier New" pitchFamily="49" charset="0"/>
+                <a:ea typeface="굴림" pitchFamily="50" charset="-127"/>
+                <a:cs typeface="Courier New" pitchFamily="49" charset="0"/>
+              </a:rPr>
+              <a:t>ft.amount</a:t>
+            </a:r>
+            <a:r>
+              <a:rPr lang="en-US" altLang="ko-KR" sz="1100" b="1" dirty="0">
+                <a:latin typeface="Courier New" pitchFamily="49" charset="0"/>
+                <a:ea typeface="굴림" pitchFamily="50" charset="-127"/>
+                <a:cs typeface="Courier New" pitchFamily="49" charset="0"/>
+              </a:rPr>
+              <a:t>);</a:t>
+            </a:r>
+          </a:p>
+          <a:p>
+            <a:pPr>
+              <a:defRPr/>
+            </a:pPr>
+            <a:r>
+              <a:rPr lang="en-US" altLang="ko-KR" sz="1100" b="1" dirty="0">
+                <a:latin typeface="Courier New" pitchFamily="49" charset="0"/>
+                <a:ea typeface="굴림" pitchFamily="50" charset="-127"/>
+                <a:cs typeface="Courier New" pitchFamily="49" charset="0"/>
+              </a:rPr>
+              <a:t>               }</a:t>
+            </a:r>
+          </a:p>
+          <a:p>
+            <a:pPr>
+              <a:defRPr/>
+            </a:pPr>
+            <a:r>
+              <a:rPr lang="en-US" altLang="ko-KR" sz="1100" b="1" dirty="0">
+                <a:latin typeface="Courier New" pitchFamily="49" charset="0"/>
+                <a:ea typeface="굴림" pitchFamily="50" charset="-127"/>
+                <a:cs typeface="Courier New" pitchFamily="49" charset="0"/>
+              </a:rPr>
+              <a:t>           }</a:t>
+            </a:r>
+          </a:p>
+          <a:p>
+            <a:pPr>
+              <a:defRPr/>
+            </a:pPr>
+            <a:r>
+              <a:rPr lang="en-US" altLang="ko-KR" sz="1100" b="1" dirty="0">
+                <a:latin typeface="Courier New" pitchFamily="49" charset="0"/>
+                <a:ea typeface="굴림" pitchFamily="50" charset="-127"/>
+                <a:cs typeface="Courier New" pitchFamily="49" charset="0"/>
+              </a:rPr>
+              <a:t>      }</a:t>
+            </a:r>
+          </a:p>
+          <a:p>
+            <a:pPr>
+              <a:defRPr/>
+            </a:pPr>
+            <a:r>
+              <a:rPr lang="en-US" altLang="ko-KR" sz="1100" b="1" dirty="0">
+                <a:latin typeface="Courier New" pitchFamily="49" charset="0"/>
+                <a:ea typeface="굴림" pitchFamily="50" charset="-127"/>
+                <a:cs typeface="Courier New" pitchFamily="49" charset="0"/>
+              </a:rPr>
+              <a:t>   }</a:t>
+            </a:r>
+          </a:p>
+          <a:p>
+            <a:pPr>
+              <a:defRPr/>
+            </a:pPr>
+            <a:r>
+              <a:rPr lang="en-US" altLang="ko-KR" sz="1100" b="1" dirty="0">
+                <a:latin typeface="Courier New" pitchFamily="49" charset="0"/>
+                <a:ea typeface="굴림" pitchFamily="50" charset="-127"/>
+                <a:cs typeface="Courier New" pitchFamily="49" charset="0"/>
+              </a:rPr>
+              <a:t>}</a:t>
+            </a:r>
+            <a:endParaRPr lang="ko-KR" altLang="en-US" sz="1100" dirty="0">
+              <a:latin typeface="굴림" pitchFamily="50" charset="-127"/>
+              <a:ea typeface="굴림" pitchFamily="50" charset="-127"/>
+            </a:endParaRPr>
+          </a:p>
+        </p:txBody>
+      </p:sp>
+    </p:spTree>
+  </p:cSld>
+  <p:clrMapOvr>
+    <a:masterClrMapping/>
+  </p:clrMapOvr>
+</p:sld>
+</file>
+
+<file path=ppt/slides/slide51.xml><?xml version="1.0" encoding="utf-8"?>
+<p:sld xmlns:a="http://schemas.openxmlformats.org/drawingml/2006/main" xmlns:r="http://schemas.openxmlformats.org/officeDocument/2006/relationships" xmlns:p="http://schemas.openxmlformats.org/presentationml/2006/main">
+  <p:cSld>
+    <p:spTree>
+      <p:nvGrpSpPr>
+        <p:cNvPr id="1" name=""/>
+        <p:cNvGrpSpPr/>
+        <p:nvPr/>
+      </p:nvGrpSpPr>
+      <p:grpSpPr>
+        <a:xfrm>
+          <a:off x="0" y="0"/>
+          <a:ext cx="0" cy="0"/>
+          <a:chOff x="0" y="0"/>
+          <a:chExt cx="0" cy="0"/>
+        </a:xfrm>
+      </p:grpSpPr>
+      <p:sp>
+        <p:nvSpPr>
           <p:cNvPr id="49154" name="제목 1">
             <a:extLst>
               <a:ext uri="{FF2B5EF4-FFF2-40B4-BE49-F238E27FC236}">
@@ -22393,7 +22643,7 @@
 </p:sld>
 </file>
 
-<file path=ppt/slides/slide51.xml><?xml version="1.0" encoding="utf-8"?>
+<file path=ppt/slides/slide52.xml><?xml version="1.0" encoding="utf-8"?>
 <p:sld xmlns:a="http://schemas.openxmlformats.org/drawingml/2006/main" xmlns:r="http://schemas.openxmlformats.org/officeDocument/2006/relationships" xmlns:p="http://schemas.openxmlformats.org/presentationml/2006/main">
   <p:cSld>
     <p:spTree>
@@ -22708,7 +22958,7 @@
 </p:sld>
 </file>
 
-<file path=ppt/slides/slide52.xml><?xml version="1.0" encoding="utf-8"?>
+<file path=ppt/slides/slide53.xml><?xml version="1.0" encoding="utf-8"?>
 <p:sld xmlns:a="http://schemas.openxmlformats.org/drawingml/2006/main" xmlns:r="http://schemas.openxmlformats.org/officeDocument/2006/relationships" xmlns:p="http://schemas.openxmlformats.org/presentationml/2006/main">
   <p:cSld>
     <p:spTree>
@@ -22824,7 +23074,7 @@
 </p:sld>
 </file>
 
-<file path=ppt/slides/slide53.xml><?xml version="1.0" encoding="utf-8"?>
+<file path=ppt/slides/slide54.xml><?xml version="1.0" encoding="utf-8"?>
 <p:sld xmlns:a="http://schemas.openxmlformats.org/drawingml/2006/main" xmlns:r="http://schemas.openxmlformats.org/officeDocument/2006/relationships" xmlns:p="http://schemas.openxmlformats.org/presentationml/2006/main">
   <p:cSld>
     <p:spTree>
@@ -23303,7 +23553,7 @@
 </p:sld>
 </file>
 
-<file path=ppt/slides/slide54.xml><?xml version="1.0" encoding="utf-8"?>
+<file path=ppt/slides/slide55.xml><?xml version="1.0" encoding="utf-8"?>
 <p:sld xmlns:a="http://schemas.openxmlformats.org/drawingml/2006/main" xmlns:r="http://schemas.openxmlformats.org/officeDocument/2006/relationships" xmlns:p="http://schemas.openxmlformats.org/presentationml/2006/main">
   <p:cSld>
     <p:spTree>
@@ -23968,7 +24218,7 @@
 </p:sld>
 </file>
 
-<file path=ppt/slides/slide55.xml><?xml version="1.0" encoding="utf-8"?>
+<file path=ppt/slides/slide56.xml><?xml version="1.0" encoding="utf-8"?>
 <p:sld xmlns:a="http://schemas.openxmlformats.org/drawingml/2006/main" xmlns:r="http://schemas.openxmlformats.org/officeDocument/2006/relationships" xmlns:p="http://schemas.openxmlformats.org/presentationml/2006/main">
   <p:cSld>
     <p:spTree>
@@ -24371,7 +24621,7 @@
 </p:sld>
 </file>
 
-<file path=ppt/slides/slide56.xml><?xml version="1.0" encoding="utf-8"?>
+<file path=ppt/slides/slide57.xml><?xml version="1.0" encoding="utf-8"?>
 <p:sld xmlns:a="http://schemas.openxmlformats.org/drawingml/2006/main" xmlns:r="http://schemas.openxmlformats.org/officeDocument/2006/relationships" xmlns:p="http://schemas.openxmlformats.org/presentationml/2006/main">
   <p:cSld>
     <p:spTree>
